--- a/Week12/Week12_Final_Polish_TestFlight.pptx
+++ b/Week12/Week12_Final_Polish_TestFlight.pptx
@@ -1,24 +1,24 @@
 
 <file path=ppt/presentation.xml><?xml version="1.0" encoding="utf-8"?>
-<p:presentation xmlns:a="http://schemas.openxmlformats.org/drawingml/2006/main" xmlns:r="http://schemas.openxmlformats.org/officeDocument/2006/relationships" xmlns:p="http://schemas.openxmlformats.org/presentationml/2006/main" autoCompressPictures="0">
+<p:presentation xmlns:a="http://schemas.openxmlformats.org/drawingml/2006/main" xmlns:r="http://schemas.openxmlformats.org/officeDocument/2006/relationships" xmlns:p="http://schemas.openxmlformats.org/presentationml/2006/main" saveSubsetFonts="1" autoCompressPictures="0">
   <p:sldMasterIdLst>
     <p:sldMasterId id="2147483648" r:id="rId1"/>
   </p:sldMasterIdLst>
   <p:sldIdLst>
-    <p:sldId id="256" r:id="rId3"/>
-    <p:sldId id="257" r:id="rId4"/>
-    <p:sldId id="258" r:id="rId5"/>
-    <p:sldId id="259" r:id="rId6"/>
-    <p:sldId id="260" r:id="rId7"/>
-    <p:sldId id="261" r:id="rId8"/>
-    <p:sldId id="262" r:id="rId9"/>
-    <p:sldId id="263" r:id="rId10"/>
-    <p:sldId id="264" r:id="rId11"/>
-    <p:sldId id="265" r:id="rId12"/>
-    <p:sldId id="266" r:id="rId13"/>
-    <p:sldId id="267" r:id="rId14"/>
+    <p:sldId id="256" r:id="rId7"/>
+    <p:sldId id="257" r:id="rId8"/>
+    <p:sldId id="258" r:id="rId9"/>
+    <p:sldId id="259" r:id="rId10"/>
+    <p:sldId id="260" r:id="rId11"/>
+    <p:sldId id="261" r:id="rId12"/>
+    <p:sldId id="262" r:id="rId13"/>
+    <p:sldId id="263" r:id="rId14"/>
+    <p:sldId id="264" r:id="rId15"/>
+    <p:sldId id="265" r:id="rId16"/>
+    <p:sldId id="266" r:id="rId17"/>
+    <p:sldId id="267" r:id="rId18"/>
   </p:sldIdLst>
-  <p:sldSz cx="12188825" cy="6858000" type="screen4x3"/>
+  <p:sldSz cx="12188952" cy="6858000" type="screen4x3"/>
   <p:notesSz cx="6858000" cy="9144000"/>
   <p:defaultTextStyle>
     <a:defPPr>
@@ -115,22 +115,6 @@
       </a:defRPr>
     </a:lvl9pPr>
   </p:defaultTextStyle>
-  <p:extLst>
-    <p:ext uri="{EFAFB233-063F-42B5-8137-9DF3F51BA10A}">
-      <p15:sldGuideLst xmlns:p15="http://schemas.microsoft.com/office/powerpoint/2012/main">
-        <p15:guide id="1" orient="horz" pos="2189" userDrawn="1">
-          <p15:clr>
-            <a:srgbClr val="A4A3A4"/>
-          </p15:clr>
-        </p15:guide>
-        <p15:guide id="2" pos="2880" userDrawn="1">
-          <p15:clr>
-            <a:srgbClr val="A4A3A4"/>
-          </p15:clr>
-        </p15:guide>
-      </p15:sldGuideLst>
-    </p:ext>
-  </p:extLst>
 </p:presentation>
 </file>
 
@@ -315,6 +299,7 @@
           <a:p>
             <a:fld id="{5BCAD085-E8A6-8845-BD4E-CB4CCA059FC4}" type="datetimeFigureOut">
               <a:rPr lang="en-US" smtClean="0"/>
+              <a:t>1/27/13</a:t>
             </a:fld>
             <a:endParaRPr lang="en-US"/>
           </a:p>
@@ -356,12 +341,18 @@
           <a:p>
             <a:fld id="{C1FF6DA9-008F-8B48-92A6-B652298478BF}" type="slidenum">
               <a:rPr lang="en-US" smtClean="0"/>
+              <a:t>‹#›</a:t>
             </a:fld>
             <a:endParaRPr lang="en-US"/>
           </a:p>
         </p:txBody>
       </p:sp>
     </p:spTree>
+    <p:extLst>
+      <p:ext uri="{BB962C8B-B14F-4D97-AF65-F5344CB8AC3E}">
+        <p14:creationId xmlns:p14="http://schemas.microsoft.com/office/powerpoint/2010/main" val="3168075583"/>
+      </p:ext>
+    </p:extLst>
   </p:cSld>
   <p:clrMapOvr>
     <a:masterClrMapping/>
@@ -429,7 +420,6 @@
               <a:rPr lang="en-US" smtClean="0"/>
               <a:t>Click to edit Master text styles</a:t>
             </a:r>
-            <a:endParaRPr lang="en-US" smtClean="0"/>
           </a:p>
           <a:p>
             <a:pPr lvl="1"/>
@@ -437,7 +427,6 @@
               <a:rPr lang="en-US" smtClean="0"/>
               <a:t>Second level</a:t>
             </a:r>
-            <a:endParaRPr lang="en-US" smtClean="0"/>
           </a:p>
           <a:p>
             <a:pPr lvl="2"/>
@@ -445,7 +434,6 @@
               <a:rPr lang="en-US" smtClean="0"/>
               <a:t>Third level</a:t>
             </a:r>
-            <a:endParaRPr lang="en-US" smtClean="0"/>
           </a:p>
           <a:p>
             <a:pPr lvl="3"/>
@@ -453,7 +441,6 @@
               <a:rPr lang="en-US" smtClean="0"/>
               <a:t>Fourth level</a:t>
             </a:r>
-            <a:endParaRPr lang="en-US" smtClean="0"/>
           </a:p>
           <a:p>
             <a:pPr lvl="4"/>
@@ -482,6 +469,7 @@
           <a:p>
             <a:fld id="{5BCAD085-E8A6-8845-BD4E-CB4CCA059FC4}" type="datetimeFigureOut">
               <a:rPr lang="en-US" smtClean="0"/>
+              <a:t>1/27/13</a:t>
             </a:fld>
             <a:endParaRPr lang="en-US"/>
           </a:p>
@@ -523,12 +511,18 @@
           <a:p>
             <a:fld id="{C1FF6DA9-008F-8B48-92A6-B652298478BF}" type="slidenum">
               <a:rPr lang="en-US" smtClean="0"/>
+              <a:t>‹#›</a:t>
             </a:fld>
             <a:endParaRPr lang="en-US"/>
           </a:p>
         </p:txBody>
       </p:sp>
     </p:spTree>
+    <p:extLst>
+      <p:ext uri="{BB962C8B-B14F-4D97-AF65-F5344CB8AC3E}">
+        <p14:creationId xmlns:p14="http://schemas.microsoft.com/office/powerpoint/2010/main" val="2910927964"/>
+      </p:ext>
+    </p:extLst>
   </p:cSld>
   <p:clrMapOvr>
     <a:masterClrMapping/>
@@ -606,7 +600,6 @@
               <a:rPr lang="en-US" smtClean="0"/>
               <a:t>Click to edit Master text styles</a:t>
             </a:r>
-            <a:endParaRPr lang="en-US" smtClean="0"/>
           </a:p>
           <a:p>
             <a:pPr lvl="1"/>
@@ -614,7 +607,6 @@
               <a:rPr lang="en-US" smtClean="0"/>
               <a:t>Second level</a:t>
             </a:r>
-            <a:endParaRPr lang="en-US" smtClean="0"/>
           </a:p>
           <a:p>
             <a:pPr lvl="2"/>
@@ -622,7 +614,6 @@
               <a:rPr lang="en-US" smtClean="0"/>
               <a:t>Third level</a:t>
             </a:r>
-            <a:endParaRPr lang="en-US" smtClean="0"/>
           </a:p>
           <a:p>
             <a:pPr lvl="3"/>
@@ -630,7 +621,6 @@
               <a:rPr lang="en-US" smtClean="0"/>
               <a:t>Fourth level</a:t>
             </a:r>
-            <a:endParaRPr lang="en-US" smtClean="0"/>
           </a:p>
           <a:p>
             <a:pPr lvl="4"/>
@@ -659,6 +649,7 @@
           <a:p>
             <a:fld id="{5BCAD085-E8A6-8845-BD4E-CB4CCA059FC4}" type="datetimeFigureOut">
               <a:rPr lang="en-US" smtClean="0"/>
+              <a:t>1/27/13</a:t>
             </a:fld>
             <a:endParaRPr lang="en-US"/>
           </a:p>
@@ -700,12 +691,18 @@
           <a:p>
             <a:fld id="{C1FF6DA9-008F-8B48-92A6-B652298478BF}" type="slidenum">
               <a:rPr lang="en-US" smtClean="0"/>
+              <a:t>‹#›</a:t>
             </a:fld>
             <a:endParaRPr lang="en-US"/>
           </a:p>
         </p:txBody>
       </p:sp>
     </p:spTree>
+    <p:extLst>
+      <p:ext uri="{BB962C8B-B14F-4D97-AF65-F5344CB8AC3E}">
+        <p14:creationId xmlns:p14="http://schemas.microsoft.com/office/powerpoint/2010/main" val="3612223792"/>
+      </p:ext>
+    </p:extLst>
   </p:cSld>
   <p:clrMapOvr>
     <a:masterClrMapping/>
@@ -773,7 +770,6 @@
               <a:rPr lang="en-US" smtClean="0"/>
               <a:t>Click to edit Master text styles</a:t>
             </a:r>
-            <a:endParaRPr lang="en-US" smtClean="0"/>
           </a:p>
           <a:p>
             <a:pPr lvl="1"/>
@@ -781,7 +777,6 @@
               <a:rPr lang="en-US" smtClean="0"/>
               <a:t>Second level</a:t>
             </a:r>
-            <a:endParaRPr lang="en-US" smtClean="0"/>
           </a:p>
           <a:p>
             <a:pPr lvl="2"/>
@@ -789,7 +784,6 @@
               <a:rPr lang="en-US" smtClean="0"/>
               <a:t>Third level</a:t>
             </a:r>
-            <a:endParaRPr lang="en-US" smtClean="0"/>
           </a:p>
           <a:p>
             <a:pPr lvl="3"/>
@@ -797,7 +791,6 @@
               <a:rPr lang="en-US" smtClean="0"/>
               <a:t>Fourth level</a:t>
             </a:r>
-            <a:endParaRPr lang="en-US" smtClean="0"/>
           </a:p>
           <a:p>
             <a:pPr lvl="4"/>
@@ -826,6 +819,7 @@
           <a:p>
             <a:fld id="{5BCAD085-E8A6-8845-BD4E-CB4CCA059FC4}" type="datetimeFigureOut">
               <a:rPr lang="en-US" smtClean="0"/>
+              <a:t>1/27/13</a:t>
             </a:fld>
             <a:endParaRPr lang="en-US"/>
           </a:p>
@@ -867,12 +861,18 @@
           <a:p>
             <a:fld id="{C1FF6DA9-008F-8B48-92A6-B652298478BF}" type="slidenum">
               <a:rPr lang="en-US" smtClean="0"/>
+              <a:t>‹#›</a:t>
             </a:fld>
             <a:endParaRPr lang="en-US"/>
           </a:p>
         </p:txBody>
       </p:sp>
     </p:spTree>
+    <p:extLst>
+      <p:ext uri="{BB962C8B-B14F-4D97-AF65-F5344CB8AC3E}">
+        <p14:creationId xmlns:p14="http://schemas.microsoft.com/office/powerpoint/2010/main" val="2614314258"/>
+      </p:ext>
+    </p:extLst>
   </p:cSld>
   <p:clrMapOvr>
     <a:masterClrMapping/>
@@ -1045,7 +1045,6 @@
               <a:rPr lang="en-US" smtClean="0"/>
               <a:t>Click to edit Master text styles</a:t>
             </a:r>
-            <a:endParaRPr lang="en-US" smtClean="0"/>
           </a:p>
         </p:txBody>
       </p:sp>
@@ -1066,6 +1065,7 @@
           <a:p>
             <a:fld id="{5BCAD085-E8A6-8845-BD4E-CB4CCA059FC4}" type="datetimeFigureOut">
               <a:rPr lang="en-US" smtClean="0"/>
+              <a:t>1/27/13</a:t>
             </a:fld>
             <a:endParaRPr lang="en-US"/>
           </a:p>
@@ -1107,12 +1107,18 @@
           <a:p>
             <a:fld id="{C1FF6DA9-008F-8B48-92A6-B652298478BF}" type="slidenum">
               <a:rPr lang="en-US" smtClean="0"/>
+              <a:t>‹#›</a:t>
             </a:fld>
             <a:endParaRPr lang="en-US"/>
           </a:p>
         </p:txBody>
       </p:sp>
     </p:spTree>
+    <p:extLst>
+      <p:ext uri="{BB962C8B-B14F-4D97-AF65-F5344CB8AC3E}">
+        <p14:creationId xmlns:p14="http://schemas.microsoft.com/office/powerpoint/2010/main" val="960648375"/>
+      </p:ext>
+    </p:extLst>
   </p:cSld>
   <p:clrMapOvr>
     <a:masterClrMapping/>
@@ -1213,7 +1219,6 @@
               <a:rPr lang="en-US" smtClean="0"/>
               <a:t>Click to edit Master text styles</a:t>
             </a:r>
-            <a:endParaRPr lang="en-US" smtClean="0"/>
           </a:p>
           <a:p>
             <a:pPr lvl="1"/>
@@ -1221,7 +1226,6 @@
               <a:rPr lang="en-US" smtClean="0"/>
               <a:t>Second level</a:t>
             </a:r>
-            <a:endParaRPr lang="en-US" smtClean="0"/>
           </a:p>
           <a:p>
             <a:pPr lvl="2"/>
@@ -1229,7 +1233,6 @@
               <a:rPr lang="en-US" smtClean="0"/>
               <a:t>Third level</a:t>
             </a:r>
-            <a:endParaRPr lang="en-US" smtClean="0"/>
           </a:p>
           <a:p>
             <a:pPr lvl="3"/>
@@ -1237,7 +1240,6 @@
               <a:rPr lang="en-US" smtClean="0"/>
               <a:t>Fourth level</a:t>
             </a:r>
-            <a:endParaRPr lang="en-US" smtClean="0"/>
           </a:p>
           <a:p>
             <a:pPr lvl="4"/>
@@ -1302,7 +1304,6 @@
               <a:rPr lang="en-US" smtClean="0"/>
               <a:t>Click to edit Master text styles</a:t>
             </a:r>
-            <a:endParaRPr lang="en-US" smtClean="0"/>
           </a:p>
           <a:p>
             <a:pPr lvl="1"/>
@@ -1310,7 +1311,6 @@
               <a:rPr lang="en-US" smtClean="0"/>
               <a:t>Second level</a:t>
             </a:r>
-            <a:endParaRPr lang="en-US" smtClean="0"/>
           </a:p>
           <a:p>
             <a:pPr lvl="2"/>
@@ -1318,7 +1318,6 @@
               <a:rPr lang="en-US" smtClean="0"/>
               <a:t>Third level</a:t>
             </a:r>
-            <a:endParaRPr lang="en-US" smtClean="0"/>
           </a:p>
           <a:p>
             <a:pPr lvl="3"/>
@@ -1326,7 +1325,6 @@
               <a:rPr lang="en-US" smtClean="0"/>
               <a:t>Fourth level</a:t>
             </a:r>
-            <a:endParaRPr lang="en-US" smtClean="0"/>
           </a:p>
           <a:p>
             <a:pPr lvl="4"/>
@@ -1355,6 +1353,7 @@
           <a:p>
             <a:fld id="{5BCAD085-E8A6-8845-BD4E-CB4CCA059FC4}" type="datetimeFigureOut">
               <a:rPr lang="en-US" smtClean="0"/>
+              <a:t>1/27/13</a:t>
             </a:fld>
             <a:endParaRPr lang="en-US"/>
           </a:p>
@@ -1396,12 +1395,18 @@
           <a:p>
             <a:fld id="{C1FF6DA9-008F-8B48-92A6-B652298478BF}" type="slidenum">
               <a:rPr lang="en-US" smtClean="0"/>
+              <a:t>‹#›</a:t>
             </a:fld>
             <a:endParaRPr lang="en-US"/>
           </a:p>
         </p:txBody>
       </p:sp>
     </p:spTree>
+    <p:extLst>
+      <p:ext uri="{BB962C8B-B14F-4D97-AF65-F5344CB8AC3E}">
+        <p14:creationId xmlns:p14="http://schemas.microsoft.com/office/powerpoint/2010/main" val="2782244947"/>
+      </p:ext>
+    </p:extLst>
   </p:cSld>
   <p:clrMapOvr>
     <a:masterClrMapping/>
@@ -1515,7 +1520,6 @@
               <a:rPr lang="en-US" smtClean="0"/>
               <a:t>Click to edit Master text styles</a:t>
             </a:r>
-            <a:endParaRPr lang="en-US" smtClean="0"/>
           </a:p>
         </p:txBody>
       </p:sp>
@@ -1572,7 +1576,6 @@
               <a:rPr lang="en-US" smtClean="0"/>
               <a:t>Click to edit Master text styles</a:t>
             </a:r>
-            <a:endParaRPr lang="en-US" smtClean="0"/>
           </a:p>
           <a:p>
             <a:pPr lvl="1"/>
@@ -1580,7 +1583,6 @@
               <a:rPr lang="en-US" smtClean="0"/>
               <a:t>Second level</a:t>
             </a:r>
-            <a:endParaRPr lang="en-US" smtClean="0"/>
           </a:p>
           <a:p>
             <a:pPr lvl="2"/>
@@ -1588,7 +1590,6 @@
               <a:rPr lang="en-US" smtClean="0"/>
               <a:t>Third level</a:t>
             </a:r>
-            <a:endParaRPr lang="en-US" smtClean="0"/>
           </a:p>
           <a:p>
             <a:pPr lvl="3"/>
@@ -1596,7 +1597,6 @@
               <a:rPr lang="en-US" smtClean="0"/>
               <a:t>Fourth level</a:t>
             </a:r>
-            <a:endParaRPr lang="en-US" smtClean="0"/>
           </a:p>
           <a:p>
             <a:pPr lvl="4"/>
@@ -1670,7 +1670,6 @@
               <a:rPr lang="en-US" smtClean="0"/>
               <a:t>Click to edit Master text styles</a:t>
             </a:r>
-            <a:endParaRPr lang="en-US" smtClean="0"/>
           </a:p>
         </p:txBody>
       </p:sp>
@@ -1727,7 +1726,6 @@
               <a:rPr lang="en-US" smtClean="0"/>
               <a:t>Click to edit Master text styles</a:t>
             </a:r>
-            <a:endParaRPr lang="en-US" smtClean="0"/>
           </a:p>
           <a:p>
             <a:pPr lvl="1"/>
@@ -1735,7 +1733,6 @@
               <a:rPr lang="en-US" smtClean="0"/>
               <a:t>Second level</a:t>
             </a:r>
-            <a:endParaRPr lang="en-US" smtClean="0"/>
           </a:p>
           <a:p>
             <a:pPr lvl="2"/>
@@ -1743,7 +1740,6 @@
               <a:rPr lang="en-US" smtClean="0"/>
               <a:t>Third level</a:t>
             </a:r>
-            <a:endParaRPr lang="en-US" smtClean="0"/>
           </a:p>
           <a:p>
             <a:pPr lvl="3"/>
@@ -1751,7 +1747,6 @@
               <a:rPr lang="en-US" smtClean="0"/>
               <a:t>Fourth level</a:t>
             </a:r>
-            <a:endParaRPr lang="en-US" smtClean="0"/>
           </a:p>
           <a:p>
             <a:pPr lvl="4"/>
@@ -1780,6 +1775,7 @@
           <a:p>
             <a:fld id="{5BCAD085-E8A6-8845-BD4E-CB4CCA059FC4}" type="datetimeFigureOut">
               <a:rPr lang="en-US" smtClean="0"/>
+              <a:t>1/27/13</a:t>
             </a:fld>
             <a:endParaRPr lang="en-US"/>
           </a:p>
@@ -1821,12 +1817,18 @@
           <a:p>
             <a:fld id="{C1FF6DA9-008F-8B48-92A6-B652298478BF}" type="slidenum">
               <a:rPr lang="en-US" smtClean="0"/>
+              <a:t>‹#›</a:t>
             </a:fld>
             <a:endParaRPr lang="en-US"/>
           </a:p>
         </p:txBody>
       </p:sp>
     </p:spTree>
+    <p:extLst>
+      <p:ext uri="{BB962C8B-B14F-4D97-AF65-F5344CB8AC3E}">
+        <p14:creationId xmlns:p14="http://schemas.microsoft.com/office/powerpoint/2010/main" val="990158736"/>
+      </p:ext>
+    </p:extLst>
   </p:cSld>
   <p:clrMapOvr>
     <a:masterClrMapping/>
@@ -1891,6 +1893,7 @@
           <a:p>
             <a:fld id="{5BCAD085-E8A6-8845-BD4E-CB4CCA059FC4}" type="datetimeFigureOut">
               <a:rPr lang="en-US" smtClean="0"/>
+              <a:t>1/27/13</a:t>
             </a:fld>
             <a:endParaRPr lang="en-US"/>
           </a:p>
@@ -1932,12 +1935,18 @@
           <a:p>
             <a:fld id="{C1FF6DA9-008F-8B48-92A6-B652298478BF}" type="slidenum">
               <a:rPr lang="en-US" smtClean="0"/>
+              <a:t>‹#›</a:t>
             </a:fld>
             <a:endParaRPr lang="en-US"/>
           </a:p>
         </p:txBody>
       </p:sp>
     </p:spTree>
+    <p:extLst>
+      <p:ext uri="{BB962C8B-B14F-4D97-AF65-F5344CB8AC3E}">
+        <p14:creationId xmlns:p14="http://schemas.microsoft.com/office/powerpoint/2010/main" val="727027711"/>
+      </p:ext>
+    </p:extLst>
   </p:cSld>
   <p:clrMapOvr>
     <a:masterClrMapping/>
@@ -1979,6 +1988,7 @@
           <a:p>
             <a:fld id="{5BCAD085-E8A6-8845-BD4E-CB4CCA059FC4}" type="datetimeFigureOut">
               <a:rPr lang="en-US" smtClean="0"/>
+              <a:t>1/27/13</a:t>
             </a:fld>
             <a:endParaRPr lang="en-US"/>
           </a:p>
@@ -2020,12 +2030,18 @@
           <a:p>
             <a:fld id="{C1FF6DA9-008F-8B48-92A6-B652298478BF}" type="slidenum">
               <a:rPr lang="en-US" smtClean="0"/>
+              <a:t>‹#›</a:t>
             </a:fld>
             <a:endParaRPr lang="en-US"/>
           </a:p>
         </p:txBody>
       </p:sp>
     </p:spTree>
+    <p:extLst>
+      <p:ext uri="{BB962C8B-B14F-4D97-AF65-F5344CB8AC3E}">
+        <p14:creationId xmlns:p14="http://schemas.microsoft.com/office/powerpoint/2010/main" val="1212999818"/>
+      </p:ext>
+    </p:extLst>
   </p:cSld>
   <p:clrMapOvr>
     <a:masterClrMapping/>
@@ -2135,7 +2151,6 @@
               <a:rPr lang="en-US" smtClean="0"/>
               <a:t>Click to edit Master text styles</a:t>
             </a:r>
-            <a:endParaRPr lang="en-US" smtClean="0"/>
           </a:p>
           <a:p>
             <a:pPr lvl="1"/>
@@ -2143,7 +2158,6 @@
               <a:rPr lang="en-US" smtClean="0"/>
               <a:t>Second level</a:t>
             </a:r>
-            <a:endParaRPr lang="en-US" smtClean="0"/>
           </a:p>
           <a:p>
             <a:pPr lvl="2"/>
@@ -2151,7 +2165,6 @@
               <a:rPr lang="en-US" smtClean="0"/>
               <a:t>Third level</a:t>
             </a:r>
-            <a:endParaRPr lang="en-US" smtClean="0"/>
           </a:p>
           <a:p>
             <a:pPr lvl="3"/>
@@ -2159,7 +2172,6 @@
               <a:rPr lang="en-US" smtClean="0"/>
               <a:t>Fourth level</a:t>
             </a:r>
-            <a:endParaRPr lang="en-US" smtClean="0"/>
           </a:p>
           <a:p>
             <a:pPr lvl="4"/>
@@ -2233,7 +2245,6 @@
               <a:rPr lang="en-US" smtClean="0"/>
               <a:t>Click to edit Master text styles</a:t>
             </a:r>
-            <a:endParaRPr lang="en-US" smtClean="0"/>
           </a:p>
         </p:txBody>
       </p:sp>
@@ -2254,6 +2265,7 @@
           <a:p>
             <a:fld id="{5BCAD085-E8A6-8845-BD4E-CB4CCA059FC4}" type="datetimeFigureOut">
               <a:rPr lang="en-US" smtClean="0"/>
+              <a:t>1/27/13</a:t>
             </a:fld>
             <a:endParaRPr lang="en-US"/>
           </a:p>
@@ -2295,12 +2307,18 @@
           <a:p>
             <a:fld id="{C1FF6DA9-008F-8B48-92A6-B652298478BF}" type="slidenum">
               <a:rPr lang="en-US" smtClean="0"/>
+              <a:t>‹#›</a:t>
             </a:fld>
             <a:endParaRPr lang="en-US"/>
           </a:p>
         </p:txBody>
       </p:sp>
     </p:spTree>
+    <p:extLst>
+      <p:ext uri="{BB962C8B-B14F-4D97-AF65-F5344CB8AC3E}">
+        <p14:creationId xmlns:p14="http://schemas.microsoft.com/office/powerpoint/2010/main" val="1840726560"/>
+      </p:ext>
+    </p:extLst>
   </p:cSld>
   <p:clrMapOvr>
     <a:masterClrMapping/>
@@ -2480,7 +2498,6 @@
               <a:rPr lang="en-US" smtClean="0"/>
               <a:t>Click to edit Master text styles</a:t>
             </a:r>
-            <a:endParaRPr lang="en-US" smtClean="0"/>
           </a:p>
         </p:txBody>
       </p:sp>
@@ -2501,6 +2518,7 @@
           <a:p>
             <a:fld id="{5BCAD085-E8A6-8845-BD4E-CB4CCA059FC4}" type="datetimeFigureOut">
               <a:rPr lang="en-US" smtClean="0"/>
+              <a:t>1/27/13</a:t>
             </a:fld>
             <a:endParaRPr lang="en-US"/>
           </a:p>
@@ -2542,12 +2560,18 @@
           <a:p>
             <a:fld id="{C1FF6DA9-008F-8B48-92A6-B652298478BF}" type="slidenum">
               <a:rPr lang="en-US" smtClean="0"/>
+              <a:t>‹#›</a:t>
             </a:fld>
             <a:endParaRPr lang="en-US"/>
           </a:p>
         </p:txBody>
       </p:sp>
     </p:spTree>
+    <p:extLst>
+      <p:ext uri="{BB962C8B-B14F-4D97-AF65-F5344CB8AC3E}">
+        <p14:creationId xmlns:p14="http://schemas.microsoft.com/office/powerpoint/2010/main" val="3889236939"/>
+      </p:ext>
+    </p:extLst>
   </p:cSld>
   <p:clrMapOvr>
     <a:masterClrMapping/>
@@ -2640,7 +2664,6 @@
               <a:rPr lang="en-US" smtClean="0"/>
               <a:t>Click to edit Master text styles</a:t>
             </a:r>
-            <a:endParaRPr lang="en-US" smtClean="0"/>
           </a:p>
           <a:p>
             <a:pPr lvl="1"/>
@@ -2648,7 +2671,6 @@
               <a:rPr lang="en-US" smtClean="0"/>
               <a:t>Second level</a:t>
             </a:r>
-            <a:endParaRPr lang="en-US" smtClean="0"/>
           </a:p>
           <a:p>
             <a:pPr lvl="2"/>
@@ -2656,7 +2678,6 @@
               <a:rPr lang="en-US" smtClean="0"/>
               <a:t>Third level</a:t>
             </a:r>
-            <a:endParaRPr lang="en-US" smtClean="0"/>
           </a:p>
           <a:p>
             <a:pPr lvl="3"/>
@@ -2664,7 +2685,6 @@
               <a:rPr lang="en-US" smtClean="0"/>
               <a:t>Fourth level</a:t>
             </a:r>
-            <a:endParaRPr lang="en-US" smtClean="0"/>
           </a:p>
           <a:p>
             <a:pPr lvl="4"/>
@@ -2711,6 +2731,7 @@
           <a:p>
             <a:fld id="{5BCAD085-E8A6-8845-BD4E-CB4CCA059FC4}" type="datetimeFigureOut">
               <a:rPr lang="en-US" smtClean="0"/>
+              <a:t>1/27/13</a:t>
             </a:fld>
             <a:endParaRPr lang="en-US"/>
           </a:p>
@@ -2788,12 +2809,18 @@
           <a:p>
             <a:fld id="{C1FF6DA9-008F-8B48-92A6-B652298478BF}" type="slidenum">
               <a:rPr lang="en-US" smtClean="0"/>
+              <a:t>‹#›</a:t>
             </a:fld>
             <a:endParaRPr lang="en-US"/>
           </a:p>
         </p:txBody>
       </p:sp>
     </p:spTree>
+    <p:extLst>
+      <p:ext uri="{BB962C8B-B14F-4D97-AF65-F5344CB8AC3E}">
+        <p14:creationId xmlns:p14="http://schemas.microsoft.com/office/powerpoint/2010/main" val="2209977519"/>
+      </p:ext>
+    </p:extLst>
   </p:cSld>
   <p:clrMap bg1="lt1" tx1="dk1" bg2="lt2" tx2="dk2" accent1="accent1" accent2="accent2" accent3="accent3" accent4="accent4" accent5="accent5" accent6="accent6" hlink="hlink" folHlink="folHlink"/>
   <p:sldLayoutIdLst>
@@ -2831,7 +2858,7 @@
         <a:spcBef>
           <a:spcPct val="20000"/>
         </a:spcBef>
-        <a:buFont typeface="Arial" panose="020B0604020202090204"/>
+        <a:buFont typeface="Arial"/>
         <a:buChar char="•"/>
         <a:defRPr sz="3200" kern="1200">
           <a:solidFill>
@@ -2846,7 +2873,7 @@
         <a:spcBef>
           <a:spcPct val="20000"/>
         </a:spcBef>
-        <a:buFont typeface="Arial" panose="020B0604020202090204"/>
+        <a:buFont typeface="Arial"/>
         <a:buChar char="–"/>
         <a:defRPr sz="2800" kern="1200">
           <a:solidFill>
@@ -2861,7 +2888,7 @@
         <a:spcBef>
           <a:spcPct val="20000"/>
         </a:spcBef>
-        <a:buFont typeface="Arial" panose="020B0604020202090204"/>
+        <a:buFont typeface="Arial"/>
         <a:buChar char="•"/>
         <a:defRPr sz="2400" kern="1200">
           <a:solidFill>
@@ -2876,7 +2903,7 @@
         <a:spcBef>
           <a:spcPct val="20000"/>
         </a:spcBef>
-        <a:buFont typeface="Arial" panose="020B0604020202090204"/>
+        <a:buFont typeface="Arial"/>
         <a:buChar char="–"/>
         <a:defRPr sz="2000" kern="1200">
           <a:solidFill>
@@ -2891,7 +2918,7 @@
         <a:spcBef>
           <a:spcPct val="20000"/>
         </a:spcBef>
-        <a:buFont typeface="Arial" panose="020B0604020202090204"/>
+        <a:buFont typeface="Arial"/>
         <a:buChar char="»"/>
         <a:defRPr sz="2000" kern="1200">
           <a:solidFill>
@@ -2906,7 +2933,7 @@
         <a:spcBef>
           <a:spcPct val="20000"/>
         </a:spcBef>
-        <a:buFont typeface="Arial" panose="020B0604020202090204"/>
+        <a:buFont typeface="Arial"/>
         <a:buChar char="•"/>
         <a:defRPr sz="2000" kern="1200">
           <a:solidFill>
@@ -2921,7 +2948,7 @@
         <a:spcBef>
           <a:spcPct val="20000"/>
         </a:spcBef>
-        <a:buFont typeface="Arial" panose="020B0604020202090204"/>
+        <a:buFont typeface="Arial"/>
         <a:buChar char="•"/>
         <a:defRPr sz="2000" kern="1200">
           <a:solidFill>
@@ -2936,7 +2963,7 @@
         <a:spcBef>
           <a:spcPct val="20000"/>
         </a:spcBef>
-        <a:buFont typeface="Arial" panose="020B0604020202090204"/>
+        <a:buFont typeface="Arial"/>
         <a:buChar char="•"/>
         <a:defRPr sz="2000" kern="1200">
           <a:solidFill>
@@ -2951,7 +2978,7 @@
         <a:spcBef>
           <a:spcPct val="20000"/>
         </a:spcBef>
-        <a:buFont typeface="Arial" panose="020B0604020202090204"/>
+        <a:buFont typeface="Arial"/>
         <a:buChar char="•"/>
         <a:defRPr sz="2000" kern="1200">
           <a:solidFill>
@@ -3063,7 +3090,7 @@
 </file>
 
 <file path=ppt/slides/slide1.xml><?xml version="1.0" encoding="utf-8"?>
-<p:sld xmlns:a="http://schemas.openxmlformats.org/drawingml/2006/main" xmlns:r="http://schemas.openxmlformats.org/officeDocument/2006/relationships" xmlns:p="http://schemas.openxmlformats.org/presentationml/2006/main">
+<p:sld xmlns:a="http://schemas.openxmlformats.org/drawingml/2006/main" xmlns:p="http://schemas.openxmlformats.org/presentationml/2006/main" xmlns:r="http://schemas.openxmlformats.org/officeDocument/2006/relationships">
   <p:cSld>
     <p:bg>
       <p:bgPr>
@@ -3154,11 +3181,6 @@
               </a:rPr>
               <a:t>SmartFarmer Assistant · iOS SwiftUI Course</a:t>
             </a:r>
-            <a:endParaRPr sz="1300" b="0" i="0">
-              <a:solidFill>
-                <a:srgbClr val="AAAABB"/>
-              </a:solidFill>
-            </a:endParaRPr>
           </a:p>
         </p:txBody>
       </p:sp>
@@ -3193,11 +3215,6 @@
               </a:rPr>
               <a:t>Week 12</a:t>
             </a:r>
-            <a:endParaRPr sz="5200" b="1" i="0">
-              <a:solidFill>
-                <a:srgbClr val="00C9C8"/>
-              </a:solidFill>
-            </a:endParaRPr>
           </a:p>
         </p:txBody>
       </p:sp>
@@ -3230,13 +3247,8 @@
                   <a:srgbClr val="FFFFFF"/>
                 </a:solidFill>
               </a:rPr>
-              <a:t>Final Polish &amp; TestFlight Distribution</a:t>
-            </a:r>
-            <a:endParaRPr sz="3200" b="1" i="0">
-              <a:solidFill>
-                <a:srgbClr val="FFFFFF"/>
-              </a:solidFill>
-            </a:endParaRPr>
+              <a:t>ការតុបតែងចុងក្រោយ &amp; TestFlight</a:t>
+            </a:r>
           </a:p>
         </p:txBody>
       </p:sp>
@@ -3269,14 +3281,9 @@
                   <a:srgbClr val="AAAABB"/>
                 </a:solidFill>
               </a:rPr>
-              <a:t>Preparing for real farmer testing —
-App icon, launch screen, TestFlight setup &amp; user guide</a:t>
-            </a:r>
-            <a:endParaRPr sz="2000" b="0" i="0">
-              <a:solidFill>
-                <a:srgbClr val="AAAABB"/>
-              </a:solidFill>
-            </a:endParaRPr>
+              <a:t>រៀបចំសម្រាប់ការសាកល្បងកសិករពិត —
+App icon, launch screen, TestFlight &amp; ការណែនាំ</a:t>
+            </a:r>
           </a:p>
         </p:txBody>
       </p:sp>
@@ -3352,13 +3359,8 @@
                   <a:srgbClr val="FFFFFF"/>
                 </a:solidFill>
               </a:rPr>
-              <a:t>🎨  App Polish</a:t>
-            </a:r>
-            <a:endParaRPr sz="1300" b="1" i="0">
-              <a:solidFill>
-                <a:srgbClr val="FFFFFF"/>
-              </a:solidFill>
-            </a:endParaRPr>
+              <a:t>🎨  ការតុបតែង App</a:t>
+            </a:r>
           </a:p>
         </p:txBody>
       </p:sp>
@@ -3436,11 +3438,6 @@
               </a:rPr>
               <a:t>🚀  TestFlight</a:t>
             </a:r>
-            <a:endParaRPr sz="1300" b="1" i="0">
-              <a:solidFill>
-                <a:srgbClr val="FFFFFF"/>
-              </a:solidFill>
-            </a:endParaRPr>
           </a:p>
         </p:txBody>
       </p:sp>
@@ -3516,13 +3513,8 @@
                   <a:srgbClr val="FFFFFF"/>
                 </a:solidFill>
               </a:rPr>
-              <a:t>📖  User Guide</a:t>
-            </a:r>
-            <a:endParaRPr sz="1300" b="1" i="0">
-              <a:solidFill>
-                <a:srgbClr val="FFFFFF"/>
-              </a:solidFill>
-            </a:endParaRPr>
+              <a:t>📖  ការណែនាំ</a:t>
+            </a:r>
           </a:p>
         </p:txBody>
       </p:sp>
@@ -3598,13 +3590,8 @@
                   <a:srgbClr val="FFFFFF"/>
                 </a:solidFill>
               </a:rPr>
-              <a:t>📣  Feedback</a:t>
-            </a:r>
-            <a:endParaRPr sz="1300" b="1" i="0">
-              <a:solidFill>
-                <a:srgbClr val="FFFFFF"/>
-              </a:solidFill>
-            </a:endParaRPr>
+              <a:t>📣  មតិ</a:t>
+            </a:r>
           </a:p>
         </p:txBody>
       </p:sp>
@@ -3680,13 +3667,8 @@
                   <a:srgbClr val="FFFFFF"/>
                 </a:solidFill>
               </a:rPr>
-              <a:t>🏆  Final Demo</a:t>
-            </a:r>
-            <a:endParaRPr sz="1300" b="1" i="0">
-              <a:solidFill>
-                <a:srgbClr val="FFFFFF"/>
-              </a:solidFill>
-            </a:endParaRPr>
+              <a:t>🏆  Demo ចុងក្រោយ</a:t>
+            </a:r>
           </a:p>
         </p:txBody>
       </p:sp>
@@ -3719,13 +3701,8 @@
                   <a:srgbClr val="AAAABB"/>
                 </a:solidFill>
               </a:rPr>
-              <a:t>Week 12 of 12</a:t>
-            </a:r>
-            <a:endParaRPr sz="1200" b="0" i="0">
-              <a:solidFill>
-                <a:srgbClr val="AAAABB"/>
-              </a:solidFill>
-            </a:endParaRPr>
+              <a:t>Week 12 ក្នុង 12</a:t>
+            </a:r>
           </a:p>
         </p:txBody>
       </p:sp>
@@ -3738,7 +3715,7 @@
 </file>
 
 <file path=ppt/slides/slide10.xml><?xml version="1.0" encoding="utf-8"?>
-<p:sld xmlns:a="http://schemas.openxmlformats.org/drawingml/2006/main" xmlns:r="http://schemas.openxmlformats.org/officeDocument/2006/relationships" xmlns:p="http://schemas.openxmlformats.org/presentationml/2006/main">
+<p:sld xmlns:a="http://schemas.openxmlformats.org/drawingml/2006/main" xmlns:p="http://schemas.openxmlformats.org/presentationml/2006/main" xmlns:r="http://schemas.openxmlformats.org/officeDocument/2006/relationships">
   <p:cSld>
     <p:bg>
       <p:bgPr>
@@ -3829,11 +3806,6 @@
               </a:rPr>
               <a:t>🐛  Common Mistakes &amp; How to Fix Them</a:t>
             </a:r>
-            <a:endParaRPr sz="2600" b="1" i="0">
-              <a:solidFill>
-                <a:srgbClr val="FFFFFF"/>
-              </a:solidFill>
-            </a:endParaRPr>
           </a:p>
         </p:txBody>
       </p:sp>
@@ -3911,11 +3883,6 @@
               </a:rPr>
               <a:t>❌ Wrong destination selected</a:t>
             </a:r>
-            <a:endParaRPr sz="1300" b="1" i="0">
-              <a:solidFill>
-                <a:srgbClr val="E54747"/>
-              </a:solidFill>
-            </a:endParaRPr>
           </a:p>
         </p:txBody>
       </p:sp>
@@ -3950,11 +3917,6 @@
               </a:rPr>
               <a:t>→ Archive greys out or produces simulator build</a:t>
             </a:r>
-            <a:endParaRPr sz="1100" b="0" i="0">
-              <a:solidFill>
-                <a:srgbClr val="AAAABB"/>
-              </a:solidFill>
-            </a:endParaRPr>
           </a:p>
         </p:txBody>
       </p:sp>
@@ -4032,11 +3994,6 @@
               </a:rPr>
               <a:t>✅ Always select 'Any iOS Device (arm64)' before archiving</a:t>
             </a:r>
-            <a:endParaRPr sz="1100" b="0" i="0">
-              <a:solidFill>
-                <a:srgbClr val="1BB889"/>
-              </a:solidFill>
-            </a:endParaRPr>
           </a:p>
         </p:txBody>
       </p:sp>
@@ -4114,11 +4071,6 @@
               </a:rPr>
               <a:t>❌ Bundle ID mismatch</a:t>
             </a:r>
-            <a:endParaRPr sz="1300" b="1" i="0">
-              <a:solidFill>
-                <a:srgbClr val="E54747"/>
-              </a:solidFill>
-            </a:endParaRPr>
           </a:p>
         </p:txBody>
       </p:sp>
@@ -4153,11 +4105,6 @@
               </a:rPr>
               <a:t>→ Upload fails: 'No app found with bundle ID'</a:t>
             </a:r>
-            <a:endParaRPr sz="1100" b="0" i="0">
-              <a:solidFill>
-                <a:srgbClr val="AAAABB"/>
-              </a:solidFill>
-            </a:endParaRPr>
           </a:p>
         </p:txBody>
       </p:sp>
@@ -4235,11 +4182,6 @@
               </a:rPr>
               <a:t>✅ Bundle ID in Xcode must exactly match App Store Connect record</a:t>
             </a:r>
-            <a:endParaRPr sz="1100" b="0" i="0">
-              <a:solidFill>
-                <a:srgbClr val="1BB889"/>
-              </a:solidFill>
-            </a:endParaRPr>
           </a:p>
         </p:txBody>
       </p:sp>
@@ -4317,11 +4259,6 @@
               </a:rPr>
               <a:t>❌ Missing icon sizes</a:t>
             </a:r>
-            <a:endParaRPr sz="1300" b="1" i="0">
-              <a:solidFill>
-                <a:srgbClr val="E54747"/>
-              </a:solidFill>
-            </a:endParaRPr>
           </a:p>
         </p:txBody>
       </p:sp>
@@ -4356,11 +4293,6 @@
               </a:rPr>
               <a:t>→ Upload fails: 'Invalid App Store Icon'</a:t>
             </a:r>
-            <a:endParaRPr sz="1100" b="0" i="0">
-              <a:solidFill>
-                <a:srgbClr val="AAAABB"/>
-              </a:solidFill>
-            </a:endParaRPr>
           </a:p>
         </p:txBody>
       </p:sp>
@@ -4438,11 +4370,6 @@
               </a:rPr>
               <a:t>✅ Use an icon generator — fill ALL required slots in Assets.xcassets</a:t>
             </a:r>
-            <a:endParaRPr sz="1100" b="0" i="0">
-              <a:solidFill>
-                <a:srgbClr val="1BB889"/>
-              </a:solidFill>
-            </a:endParaRPr>
           </a:p>
         </p:txBody>
       </p:sp>
@@ -4520,11 +4447,6 @@
               </a:rPr>
               <a:t>❌ Build number not incremented</a:t>
             </a:r>
-            <a:endParaRPr sz="1300" b="1" i="0">
-              <a:solidFill>
-                <a:srgbClr val="E54747"/>
-              </a:solidFill>
-            </a:endParaRPr>
           </a:p>
         </p:txBody>
       </p:sp>
@@ -4559,11 +4481,6 @@
               </a:rPr>
               <a:t>→ Upload fails: 'Build already exists'</a:t>
             </a:r>
-            <a:endParaRPr sz="1100" b="0" i="0">
-              <a:solidFill>
-                <a:srgbClr val="AAAABB"/>
-              </a:solidFill>
-            </a:endParaRPr>
           </a:p>
         </p:txBody>
       </p:sp>
@@ -4641,11 +4558,6 @@
               </a:rPr>
               <a:t>✅ Increment CURRENT_PROJECT_VERSION before every archive</a:t>
             </a:r>
-            <a:endParaRPr sz="1100" b="0" i="0">
-              <a:solidFill>
-                <a:srgbClr val="1BB889"/>
-              </a:solidFill>
-            </a:endParaRPr>
           </a:p>
         </p:txBody>
       </p:sp>
@@ -4723,11 +4635,6 @@
               </a:rPr>
               <a:t>❌ LaunchScreen uses code/animations</a:t>
             </a:r>
-            <a:endParaRPr sz="1300" b="1" i="0">
-              <a:solidFill>
-                <a:srgbClr val="E54747"/>
-              </a:solidFill>
-            </a:endParaRPr>
           </a:p>
         </p:txBody>
       </p:sp>
@@ -4762,11 +4669,6 @@
               </a:rPr>
               <a:t>→ App rejected or slow launch</a:t>
             </a:r>
-            <a:endParaRPr sz="1100" b="0" i="0">
-              <a:solidFill>
-                <a:srgbClr val="AAAABB"/>
-              </a:solidFill>
-            </a:endParaRPr>
           </a:p>
         </p:txBody>
       </p:sp>
@@ -4844,11 +4746,6 @@
               </a:rPr>
               <a:t>✅ LaunchScreen.storyboard must be static — no Swift code, no animation</a:t>
             </a:r>
-            <a:endParaRPr sz="1100" b="0" i="0">
-              <a:solidFill>
-                <a:srgbClr val="1BB889"/>
-              </a:solidFill>
-            </a:endParaRPr>
           </a:p>
         </p:txBody>
       </p:sp>
@@ -4926,11 +4823,6 @@
               </a:rPr>
               <a:t>❌ Testers can't find TestFlight invite</a:t>
             </a:r>
-            <a:endParaRPr sz="1300" b="1" i="0">
-              <a:solidFill>
-                <a:srgbClr val="E54747"/>
-              </a:solidFill>
-            </a:endParaRPr>
           </a:p>
         </p:txBody>
       </p:sp>
@@ -4965,11 +4857,6 @@
               </a:rPr>
               <a:t>→ Farmers say they received no email</a:t>
             </a:r>
-            <a:endParaRPr sz="1100" b="0" i="0">
-              <a:solidFill>
-                <a:srgbClr val="AAAABB"/>
-              </a:solidFill>
-            </a:endParaRPr>
           </a:p>
         </p:txBody>
       </p:sp>
@@ -5047,11 +4934,6 @@
               </a:rPr>
               <a:t>✅ Check spam folder; use Internal Testing for first beta (no review wait)</a:t>
             </a:r>
-            <a:endParaRPr sz="1100" b="0" i="0">
-              <a:solidFill>
-                <a:srgbClr val="1BB889"/>
-              </a:solidFill>
-            </a:endParaRPr>
           </a:p>
         </p:txBody>
       </p:sp>
@@ -5064,7 +4946,7 @@
 </file>
 
 <file path=ppt/slides/slide11.xml><?xml version="1.0" encoding="utf-8"?>
-<p:sld xmlns:a="http://schemas.openxmlformats.org/drawingml/2006/main" xmlns:r="http://schemas.openxmlformats.org/officeDocument/2006/relationships" xmlns:p="http://schemas.openxmlformats.org/presentationml/2006/main">
+<p:sld xmlns:a="http://schemas.openxmlformats.org/drawingml/2006/main" xmlns:p="http://schemas.openxmlformats.org/presentationml/2006/main" xmlns:r="http://schemas.openxmlformats.org/officeDocument/2006/relationships">
   <p:cSld>
     <p:bg>
       <p:bgPr>
@@ -5155,11 +5037,6 @@
               </a:rPr>
               <a:t>🏆  Final Project Checklist</a:t>
             </a:r>
-            <a:endParaRPr sz="2600" b="1" i="0">
-              <a:solidFill>
-                <a:srgbClr val="FFFFFF"/>
-              </a:solidFill>
-            </a:endParaRPr>
           </a:p>
         </p:txBody>
       </p:sp>
@@ -5194,11 +5071,6 @@
               </a:rPr>
               <a:t>Polish &amp; Submission</a:t>
             </a:r>
-            <a:endParaRPr sz="1500" b="1" i="0">
-              <a:solidFill>
-                <a:srgbClr val="00C9C8"/>
-              </a:solidFill>
-            </a:endParaRPr>
           </a:p>
         </p:txBody>
       </p:sp>
@@ -5276,11 +5148,6 @@
               </a:rPr>
               <a:t>☐ App icon (all sizes)</a:t>
             </a:r>
-            <a:endParaRPr sz="1300" b="0" i="0">
-              <a:solidFill>
-                <a:srgbClr val="FFFFFF"/>
-              </a:solidFill>
-            </a:endParaRPr>
           </a:p>
         </p:txBody>
       </p:sp>
@@ -5358,11 +5225,6 @@
               </a:rPr>
               <a:t>☐ LaunchScreen with farm theme</a:t>
             </a:r>
-            <a:endParaRPr sz="1300" b="0" i="0">
-              <a:solidFill>
-                <a:srgbClr val="FFFFFF"/>
-              </a:solidFill>
-            </a:endParaRPr>
           </a:p>
         </p:txBody>
       </p:sp>
@@ -5440,11 +5302,6 @@
               </a:rPr>
               <a:t>☐ Bundle ID &amp; version configured</a:t>
             </a:r>
-            <a:endParaRPr sz="1300" b="0" i="0">
-              <a:solidFill>
-                <a:srgbClr val="FFFFFF"/>
-              </a:solidFill>
-            </a:endParaRPr>
           </a:p>
         </p:txBody>
       </p:sp>
@@ -5522,11 +5379,6 @@
               </a:rPr>
               <a:t>☐ Release scheme build succeeds</a:t>
             </a:r>
-            <a:endParaRPr sz="1300" b="0" i="0">
-              <a:solidFill>
-                <a:srgbClr val="FFFFFF"/>
-              </a:solidFill>
-            </a:endParaRPr>
           </a:p>
         </p:txBody>
       </p:sp>
@@ -5604,11 +5456,6 @@
               </a:rPr>
               <a:t>☐ App uploaded to TestFlight</a:t>
             </a:r>
-            <a:endParaRPr sz="1300" b="0" i="0">
-              <a:solidFill>
-                <a:srgbClr val="FFFFFF"/>
-              </a:solidFill>
-            </a:endParaRPr>
           </a:p>
         </p:txBody>
       </p:sp>
@@ -5686,11 +5533,6 @@
               </a:rPr>
               <a:t>☐ 3+ real farmers invited</a:t>
             </a:r>
-            <a:endParaRPr sz="1300" b="0" i="0">
-              <a:solidFill>
-                <a:srgbClr val="FFFFFF"/>
-              </a:solidFill>
-            </a:endParaRPr>
           </a:p>
         </p:txBody>
       </p:sp>
@@ -5768,11 +5610,6 @@
               </a:rPr>
               <a:t>☐ In-app User Guide screen done</a:t>
             </a:r>
-            <a:endParaRPr sz="1300" b="0" i="0">
-              <a:solidFill>
-                <a:srgbClr val="FFFFFF"/>
-              </a:solidFill>
-            </a:endParaRPr>
           </a:p>
         </p:txBody>
       </p:sp>
@@ -5850,11 +5687,6 @@
               </a:rPr>
               <a:t>☐ Feedback form implemented</a:t>
             </a:r>
-            <a:endParaRPr sz="1300" b="0" i="0">
-              <a:solidFill>
-                <a:srgbClr val="FFFFFF"/>
-              </a:solidFill>
-            </a:endParaRPr>
           </a:p>
         </p:txBody>
       </p:sp>
@@ -5889,11 +5721,6 @@
               </a:rPr>
               <a:t>Final Presentation &amp; Docs</a:t>
             </a:r>
-            <a:endParaRPr sz="1500" b="1" i="0">
-              <a:solidFill>
-                <a:srgbClr val="F39620"/>
-              </a:solidFill>
-            </a:endParaRPr>
           </a:p>
         </p:txBody>
       </p:sp>
@@ -5971,11 +5798,6 @@
               </a:rPr>
               <a:t>☐ README.md with architecture overview</a:t>
             </a:r>
-            <a:endParaRPr sz="1300" b="0" i="0">
-              <a:solidFill>
-                <a:srgbClr val="FFFFFF"/>
-              </a:solidFill>
-            </a:endParaRPr>
           </a:p>
         </p:txBody>
       </p:sp>
@@ -6053,11 +5875,6 @@
               </a:rPr>
               <a:t>☐ Feature list with screenshots</a:t>
             </a:r>
-            <a:endParaRPr sz="1300" b="0" i="0">
-              <a:solidFill>
-                <a:srgbClr val="FFFFFF"/>
-              </a:solidFill>
-            </a:endParaRPr>
           </a:p>
         </p:txBody>
       </p:sp>
@@ -6135,11 +5952,6 @@
               </a:rPr>
               <a:t>☐ How to run / build instructions</a:t>
             </a:r>
-            <a:endParaRPr sz="1300" b="0" i="0">
-              <a:solidFill>
-                <a:srgbClr val="FFFFFF"/>
-              </a:solidFill>
-            </a:endParaRPr>
           </a:p>
         </p:txBody>
       </p:sp>
@@ -6217,11 +6029,6 @@
               </a:rPr>
               <a:t>☐ CoreData schema diagram</a:t>
             </a:r>
-            <a:endParaRPr sz="1300" b="0" i="0">
-              <a:solidFill>
-                <a:srgbClr val="FFFFFF"/>
-              </a:solidFill>
-            </a:endParaRPr>
           </a:p>
         </p:txBody>
       </p:sp>
@@ -6299,11 +6106,6 @@
               </a:rPr>
               <a:t>☐ Known limitations section</a:t>
             </a:r>
-            <a:endParaRPr sz="1300" b="0" i="0">
-              <a:solidFill>
-                <a:srgbClr val="FFFFFF"/>
-              </a:solidFill>
-            </a:endParaRPr>
           </a:p>
         </p:txBody>
       </p:sp>
@@ -6381,11 +6183,6 @@
               </a:rPr>
               <a:t>☐ Live demo prepared (10 min)</a:t>
             </a:r>
-            <a:endParaRPr sz="1300" b="0" i="0">
-              <a:solidFill>
-                <a:srgbClr val="FFFFFF"/>
-              </a:solidFill>
-            </a:endParaRPr>
           </a:p>
         </p:txBody>
       </p:sp>
@@ -6463,11 +6260,6 @@
               </a:rPr>
               <a:t>☐ Farmer feedback summary written</a:t>
             </a:r>
-            <a:endParaRPr sz="1300" b="0" i="0">
-              <a:solidFill>
-                <a:srgbClr val="FFFFFF"/>
-              </a:solidFill>
-            </a:endParaRPr>
           </a:p>
         </p:txBody>
       </p:sp>
@@ -6545,11 +6337,6 @@
               </a:rPr>
               <a:t>☐ Next steps / roadmap documented</a:t>
             </a:r>
-            <a:endParaRPr sz="1300" b="0" i="0">
-              <a:solidFill>
-                <a:srgbClr val="FFFFFF"/>
-              </a:solidFill>
-            </a:endParaRPr>
           </a:p>
         </p:txBody>
       </p:sp>
@@ -6584,11 +6371,6 @@
               </a:rPr>
               <a:t>🎯 Goal: Farmers can install and use the app independently without any help from the developer.</a:t>
             </a:r>
-            <a:endParaRPr sz="1400" b="0" i="1">
-              <a:solidFill>
-                <a:srgbClr val="00C9C8"/>
-              </a:solidFill>
-            </a:endParaRPr>
           </a:p>
         </p:txBody>
       </p:sp>
@@ -6601,7 +6383,7 @@
 </file>
 
 <file path=ppt/slides/slide12.xml><?xml version="1.0" encoding="utf-8"?>
-<p:sld xmlns:a="http://schemas.openxmlformats.org/drawingml/2006/main" xmlns:r="http://schemas.openxmlformats.org/officeDocument/2006/relationships" xmlns:p="http://schemas.openxmlformats.org/presentationml/2006/main">
+<p:sld xmlns:a="http://schemas.openxmlformats.org/drawingml/2006/main" xmlns:p="http://schemas.openxmlformats.org/presentationml/2006/main" xmlns:r="http://schemas.openxmlformats.org/officeDocument/2006/relationships">
   <p:cSld>
     <p:bg>
       <p:bgPr>
@@ -6692,11 +6474,6 @@
               </a:rPr>
               <a:t>🎓  Course Complete — What You Built</a:t>
             </a:r>
-            <a:endParaRPr sz="2800" b="1" i="0">
-              <a:solidFill>
-                <a:srgbClr val="00C9C8"/>
-              </a:solidFill>
-            </a:endParaRPr>
           </a:p>
         </p:txBody>
       </p:sp>
@@ -6817,11 +6594,6 @@
               </a:rPr>
               <a:t>💰  Finance Tracker</a:t>
             </a:r>
-            <a:endParaRPr sz="1400" b="1" i="0">
-              <a:solidFill>
-                <a:srgbClr val="1BB889"/>
-              </a:solidFill>
-            </a:endParaRPr>
           </a:p>
         </p:txBody>
       </p:sp>
@@ -6856,11 +6628,6 @@
               </a:rPr>
               <a:t>Income/expense, profit reports, categories</a:t>
             </a:r>
-            <a:endParaRPr sz="1200" b="0" i="0">
-              <a:solidFill>
-                <a:srgbClr val="AAAABB"/>
-              </a:solidFill>
-            </a:endParaRPr>
           </a:p>
         </p:txBody>
       </p:sp>
@@ -6981,11 +6748,6 @@
               </a:rPr>
               <a:t>📅  Calendar &amp; Reminders</a:t>
             </a:r>
-            <a:endParaRPr sz="1400" b="1" i="0">
-              <a:solidFill>
-                <a:srgbClr val="287DFA"/>
-              </a:solidFill>
-            </a:endParaRPr>
           </a:p>
         </p:txBody>
       </p:sp>
@@ -7020,11 +6782,6 @@
               </a:rPr>
               <a:t>Activity scheduling, local notifications</a:t>
             </a:r>
-            <a:endParaRPr sz="1200" b="0" i="0">
-              <a:solidFill>
-                <a:srgbClr val="AAAABB"/>
-              </a:solidFill>
-            </a:endParaRPr>
           </a:p>
         </p:txBody>
       </p:sp>
@@ -7145,11 +6902,6 @@
               </a:rPr>
               <a:t>🌿  Pest &amp; Disease Guide</a:t>
             </a:r>
-            <a:endParaRPr sz="1400" b="1" i="0">
-              <a:solidFill>
-                <a:srgbClr val="E54747"/>
-              </a:solidFill>
-            </a:endParaRPr>
           </a:p>
         </p:txBody>
       </p:sp>
@@ -7184,11 +6936,6 @@
               </a:rPr>
               <a:t>Offline reference library with search</a:t>
             </a:r>
-            <a:endParaRPr sz="1200" b="0" i="0">
-              <a:solidFill>
-                <a:srgbClr val="AAAABB"/>
-              </a:solidFill>
-            </a:endParaRPr>
           </a:p>
         </p:txBody>
       </p:sp>
@@ -7309,11 +7056,6 @@
               </a:rPr>
               <a:t>📓  Daily Journal</a:t>
             </a:r>
-            <a:endParaRPr sz="1400" b="1" i="0">
-              <a:solidFill>
-                <a:srgbClr val="8E44AD"/>
-              </a:solidFill>
-            </a:endParaRPr>
           </a:p>
         </p:txBody>
       </p:sp>
@@ -7348,11 +7090,6 @@
               </a:rPr>
               <a:t>Notes with photos and weather</a:t>
             </a:r>
-            <a:endParaRPr sz="1200" b="0" i="0">
-              <a:solidFill>
-                <a:srgbClr val="AAAABB"/>
-              </a:solidFill>
-            </a:endParaRPr>
           </a:p>
         </p:txBody>
       </p:sp>
@@ -7473,11 +7210,6 @@
               </a:rPr>
               <a:t>🏠  Dashboard</a:t>
             </a:r>
-            <a:endParaRPr sz="1400" b="1" i="0">
-              <a:solidFill>
-                <a:srgbClr val="00C9C8"/>
-              </a:solidFill>
-            </a:endParaRPr>
           </a:p>
         </p:txBody>
       </p:sp>
@@ -7512,11 +7244,6 @@
               </a:rPr>
               <a:t>Unified view of all farm data</a:t>
             </a:r>
-            <a:endParaRPr sz="1200" b="0" i="0">
-              <a:solidFill>
-                <a:srgbClr val="AAAABB"/>
-              </a:solidFill>
-            </a:endParaRPr>
           </a:p>
         </p:txBody>
       </p:sp>
@@ -7637,11 +7364,6 @@
               </a:rPr>
               <a:t>📊  Reports &amp; Charts</a:t>
             </a:r>
-            <a:endParaRPr sz="1400" b="1" i="0">
-              <a:solidFill>
-                <a:srgbClr val="F39620"/>
-              </a:solidFill>
-            </a:endParaRPr>
           </a:p>
         </p:txBody>
       </p:sp>
@@ -7676,11 +7398,6 @@
               </a:rPr>
               <a:t>Visual profit/loss analysis</a:t>
             </a:r>
-            <a:endParaRPr sz="1200" b="0" i="0">
-              <a:solidFill>
-                <a:srgbClr val="AAAABB"/>
-              </a:solidFill>
-            </a:endParaRPr>
           </a:p>
         </p:txBody>
       </p:sp>
@@ -7801,11 +7518,6 @@
               </a:rPr>
               <a:t>🚀  TestFlight</a:t>
             </a:r>
-            <a:endParaRPr sz="1400" b="1" i="0">
-              <a:solidFill>
-                <a:srgbClr val="1BB889"/>
-              </a:solidFill>
-            </a:endParaRPr>
           </a:p>
         </p:txBody>
       </p:sp>
@@ -7840,11 +7552,6 @@
               </a:rPr>
               <a:t>Real-world testing with farmers</a:t>
             </a:r>
-            <a:endParaRPr sz="1200" b="0" i="0">
-              <a:solidFill>
-                <a:srgbClr val="AAAABB"/>
-              </a:solidFill>
-            </a:endParaRPr>
           </a:p>
         </p:txBody>
       </p:sp>
@@ -7965,11 +7672,6 @@
               </a:rPr>
               <a:t>🚀  TestFlight</a:t>
             </a:r>
-            <a:endParaRPr sz="1400" b="1" i="0">
-              <a:solidFill>
-                <a:srgbClr val="1BB889"/>
-              </a:solidFill>
-            </a:endParaRPr>
           </a:p>
         </p:txBody>
       </p:sp>
@@ -8004,11 +7706,6 @@
               </a:rPr>
               <a:t>Real-world testing with farmers</a:t>
             </a:r>
-            <a:endParaRPr sz="1200" b="0" i="0">
-              <a:solidFill>
-                <a:srgbClr val="AAAABB"/>
-              </a:solidFill>
-            </a:endParaRPr>
           </a:p>
         </p:txBody>
       </p:sp>
@@ -8086,11 +7783,6 @@
               </a:rPr>
               <a:t>🌾  You have built a complete, production-ready agricultural app for Cambodian farmers. Ship it. Collect feedback. Iterate.</a:t>
             </a:r>
-            <a:endParaRPr sz="1600" b="1" i="0">
-              <a:solidFill>
-                <a:srgbClr val="FFFFFF"/>
-              </a:solidFill>
-            </a:endParaRPr>
           </a:p>
         </p:txBody>
       </p:sp>
@@ -8103,7 +7795,7 @@
 </file>
 
 <file path=ppt/slides/slide2.xml><?xml version="1.0" encoding="utf-8"?>
-<p:sld xmlns:a="http://schemas.openxmlformats.org/drawingml/2006/main" xmlns:r="http://schemas.openxmlformats.org/officeDocument/2006/relationships" xmlns:p="http://schemas.openxmlformats.org/presentationml/2006/main">
+<p:sld xmlns:a="http://schemas.openxmlformats.org/drawingml/2006/main" xmlns:p="http://schemas.openxmlformats.org/presentationml/2006/main" xmlns:r="http://schemas.openxmlformats.org/officeDocument/2006/relationships">
   <p:cSld>
     <p:bg>
       <p:bgPr>
@@ -8192,13 +7884,8 @@
                   <a:srgbClr val="00C9C8"/>
                 </a:solidFill>
               </a:rPr>
-              <a:t>🎯  Learning Objectives</a:t>
-            </a:r>
-            <a:endParaRPr sz="2800" b="1" i="0">
-              <a:solidFill>
-                <a:srgbClr val="00C9C8"/>
-              </a:solidFill>
-            </a:endParaRPr>
+              <a:t>🎯  គោលបំណងរៀន</a:t>
+            </a:r>
           </a:p>
         </p:txBody>
       </p:sp>
@@ -8235,13 +7922,8 @@
                   <a:srgbClr val="FFFFFF"/>
                 </a:solidFill>
               </a:rPr>
-              <a:t>• Design and export a farm-themed app icon set (all required sizes) using SF Symbols / Figma</a:t>
-            </a:r>
-            <a:endParaRPr sz="1700">
-              <a:solidFill>
-                <a:srgbClr val="FFFFFF"/>
-              </a:solidFill>
-            </a:endParaRPr>
+              <a:t>• Design និង export icon set app ប្រធានបទចម្ការ (ទំហំទាំងអស់) ដោយ SF Symbols / Figma</a:t>
+            </a:r>
           </a:p>
           <a:p>
             <a:pPr>
@@ -8255,13 +7937,8 @@
                   <a:srgbClr val="FFFFFF"/>
                 </a:solidFill>
               </a:rPr>
-              <a:t>• Configure a LaunchScreen.storyboard with a branded splash screen</a:t>
-            </a:r>
-            <a:endParaRPr sz="1700">
-              <a:solidFill>
-                <a:srgbClr val="FFFFFF"/>
-              </a:solidFill>
-            </a:endParaRPr>
+              <a:t>• Configure LaunchScreen.storyboard ជាមួយ splash screen ម៉ាក</a:t>
+            </a:r>
           </a:p>
           <a:p>
             <a:pPr>
@@ -8275,13 +7952,8 @@
                   <a:srgbClr val="FFFFFF"/>
                 </a:solidFill>
               </a:rPr>
-              <a:t>• Set the correct bundle ID, display name, and version/build numbers for App Store Connect</a:t>
-            </a:r>
-            <a:endParaRPr sz="1700">
-              <a:solidFill>
-                <a:srgbClr val="FFFFFF"/>
-              </a:solidFill>
-            </a:endParaRPr>
+              <a:t>• កំណត់ bundle ID, display name, version/build numbers ត្រឹមត្រូវ</a:t>
+            </a:r>
           </a:p>
           <a:p>
             <a:pPr>
@@ -8295,13 +7967,8 @@
                   <a:srgbClr val="FFFFFF"/>
                 </a:solidFill>
               </a:rPr>
-              <a:t>• Archive and upload a build to App Store Connect using Xcode Organizer</a:t>
-            </a:r>
-            <a:endParaRPr sz="1700">
-              <a:solidFill>
-                <a:srgbClr val="FFFFFF"/>
-              </a:solidFill>
-            </a:endParaRPr>
+              <a:t>• Archive ហើយ upload build ទៅ App Store Connect ដោយ Xcode Organizer</a:t>
+            </a:r>
           </a:p>
           <a:p>
             <a:pPr>
@@ -8315,13 +7982,8 @@
                   <a:srgbClr val="FFFFFF"/>
                 </a:solidFill>
               </a:rPr>
-              <a:t>• Create a TestFlight beta group and invite real farmers as testers</a:t>
-            </a:r>
-            <a:endParaRPr sz="1700">
-              <a:solidFill>
-                <a:srgbClr val="FFFFFF"/>
-              </a:solidFill>
-            </a:endParaRPr>
+              <a:t>• បង្កើត TestFlight beta group ហើយអញ្ជើញកសិករពិតជា testers</a:t>
+            </a:r>
           </a:p>
           <a:p>
             <a:pPr>
@@ -8335,13 +7997,8 @@
                   <a:srgbClr val="FFFFFF"/>
                 </a:solidFill>
               </a:rPr>
-              <a:t>• Build an in-app user guide screen that explains each feature to first-time users</a:t>
-            </a:r>
-            <a:endParaRPr sz="1700">
-              <a:solidFill>
-                <a:srgbClr val="FFFFFF"/>
-              </a:solidFill>
-            </a:endParaRPr>
+              <a:t>• បង្កើតផ្ទាំងណែនាំ in-app ដែលពន្យល់ features ដល់ users ថ្មី</a:t>
+            </a:r>
           </a:p>
           <a:p>
             <a:pPr>
@@ -8355,13 +8012,8 @@
                   <a:srgbClr val="FFFFFF"/>
                 </a:solidFill>
               </a:rPr>
-              <a:t>• Design a structured feedback plan to collect actionable data from farmer testers</a:t>
-            </a:r>
-            <a:endParaRPr sz="1700">
-              <a:solidFill>
-                <a:srgbClr val="FFFFFF"/>
-              </a:solidFill>
-            </a:endParaRPr>
+              <a:t>• Design ផែនការ feedback ដែលស្ថានភាពប្រមូលទិន្នន័យ ពីកសិករ testers</a:t>
+            </a:r>
           </a:p>
           <a:p>
             <a:pPr>
@@ -8375,13 +8027,8 @@
                   <a:srgbClr val="FFFFFF"/>
                 </a:solidFill>
               </a:rPr>
-              <a:t>• Write a final README documenting architecture, features, and how to run the project</a:t>
-            </a:r>
-            <a:endParaRPr sz="1700">
-              <a:solidFill>
-                <a:srgbClr val="FFFFFF"/>
-              </a:solidFill>
-            </a:endParaRPr>
+              <a:t>• សរសេរ README ចុងក្រោយ ឯកសារ architecture, features, ការ run project</a:t>
+            </a:r>
           </a:p>
         </p:txBody>
       </p:sp>
@@ -8394,7 +8041,7 @@
 </file>
 
 <file path=ppt/slides/slide3.xml><?xml version="1.0" encoding="utf-8"?>
-<p:sld xmlns:a="http://schemas.openxmlformats.org/drawingml/2006/main" xmlns:r="http://schemas.openxmlformats.org/officeDocument/2006/relationships" xmlns:p="http://schemas.openxmlformats.org/presentationml/2006/main">
+<p:sld xmlns:a="http://schemas.openxmlformats.org/drawingml/2006/main" xmlns:p="http://schemas.openxmlformats.org/presentationml/2006/main" xmlns:r="http://schemas.openxmlformats.org/officeDocument/2006/relationships">
   <p:cSld>
     <p:bg>
       <p:bgPr>
@@ -8485,11 +8132,6 @@
               </a:rPr>
               <a:t>🎨  App Icon &amp; Launch Screen</a:t>
             </a:r>
-            <a:endParaRPr sz="2600" b="1" i="0">
-              <a:solidFill>
-                <a:srgbClr val="FFFFFF"/>
-              </a:solidFill>
-            </a:endParaRPr>
           </a:p>
         </p:txBody>
       </p:sp>
@@ -8522,13 +8164,8 @@
                   <a:srgbClr val="00C9C8"/>
                 </a:solidFill>
               </a:rPr>
-              <a:t>Required Icon Sizes</a:t>
-            </a:r>
-            <a:endParaRPr sz="1500" b="1" i="0">
-              <a:solidFill>
-                <a:srgbClr val="00C9C8"/>
-              </a:solidFill>
-            </a:endParaRPr>
+              <a:t>ទំហំ Icon ដែលត្រូវការ</a:t>
+            </a:r>
           </a:p>
         </p:txBody>
       </p:sp>
@@ -8606,11 +8243,6 @@
               </a:rPr>
               <a:t>iPhone Notification</a:t>
             </a:r>
-            <a:endParaRPr sz="1300" b="1" i="0">
-              <a:solidFill>
-                <a:srgbClr val="00C9C8"/>
-              </a:solidFill>
-            </a:endParaRPr>
           </a:p>
         </p:txBody>
       </p:sp>
@@ -8645,11 +8277,6 @@
               </a:rPr>
               <a:t>20 pt  → 40×40 / 60×60 px</a:t>
             </a:r>
-            <a:endParaRPr sz="1100" b="0" i="0">
-              <a:solidFill>
-                <a:srgbClr val="AAAABB"/>
-              </a:solidFill>
-            </a:endParaRPr>
           </a:p>
         </p:txBody>
       </p:sp>
@@ -8727,11 +8354,6 @@
               </a:rPr>
               <a:t>iPhone Settings</a:t>
             </a:r>
-            <a:endParaRPr sz="1300" b="1" i="0">
-              <a:solidFill>
-                <a:srgbClr val="00C9C8"/>
-              </a:solidFill>
-            </a:endParaRPr>
           </a:p>
         </p:txBody>
       </p:sp>
@@ -8766,11 +8388,6 @@
               </a:rPr>
               <a:t>29 pt  → 58×58 / 87×87 px</a:t>
             </a:r>
-            <a:endParaRPr sz="1100" b="0" i="0">
-              <a:solidFill>
-                <a:srgbClr val="AAAABB"/>
-              </a:solidFill>
-            </a:endParaRPr>
           </a:p>
         </p:txBody>
       </p:sp>
@@ -8848,11 +8465,6 @@
               </a:rPr>
               <a:t>iPhone Spotlight</a:t>
             </a:r>
-            <a:endParaRPr sz="1300" b="1" i="0">
-              <a:solidFill>
-                <a:srgbClr val="00C9C8"/>
-              </a:solidFill>
-            </a:endParaRPr>
           </a:p>
         </p:txBody>
       </p:sp>
@@ -8887,11 +8499,6 @@
               </a:rPr>
               <a:t>40 pt  → 80×80 / 120×120 px</a:t>
             </a:r>
-            <a:endParaRPr sz="1100" b="0" i="0">
-              <a:solidFill>
-                <a:srgbClr val="AAAABB"/>
-              </a:solidFill>
-            </a:endParaRPr>
           </a:p>
         </p:txBody>
       </p:sp>
@@ -8969,11 +8576,6 @@
               </a:rPr>
               <a:t>iPhone App</a:t>
             </a:r>
-            <a:endParaRPr sz="1300" b="1" i="0">
-              <a:solidFill>
-                <a:srgbClr val="00C9C8"/>
-              </a:solidFill>
-            </a:endParaRPr>
           </a:p>
         </p:txBody>
       </p:sp>
@@ -9008,11 +8610,6 @@
               </a:rPr>
               <a:t>60 pt  → 120×120 / 180×180 px</a:t>
             </a:r>
-            <a:endParaRPr sz="1100" b="0" i="0">
-              <a:solidFill>
-                <a:srgbClr val="AAAABB"/>
-              </a:solidFill>
-            </a:endParaRPr>
           </a:p>
         </p:txBody>
       </p:sp>
@@ -9090,11 +8687,6 @@
               </a:rPr>
               <a:t>App Store</a:t>
             </a:r>
-            <a:endParaRPr sz="1300" b="1" i="0">
-              <a:solidFill>
-                <a:srgbClr val="00C9C8"/>
-              </a:solidFill>
-            </a:endParaRPr>
           </a:p>
         </p:txBody>
       </p:sp>
@@ -9129,11 +8721,6 @@
               </a:rPr>
               <a:t>1024 pt → 1024×1024 px</a:t>
             </a:r>
-            <a:endParaRPr sz="1100" b="0" i="0">
-              <a:solidFill>
-                <a:srgbClr val="AAAABB"/>
-              </a:solidFill>
-            </a:endParaRPr>
           </a:p>
         </p:txBody>
       </p:sp>
@@ -9145,8 +8732,8 @@
         </p:nvSpPr>
         <p:spPr>
           <a:xfrm>
-            <a:off x="8441690" y="957580"/>
-            <a:ext cx="3250565" cy="321945"/>
+            <a:off x="6126480" y="1005840"/>
+            <a:ext cx="5760720" cy="365760"/>
           </a:xfrm>
           <a:prstGeom prst="rect">
             <a:avLst/>
@@ -9168,11 +8755,6 @@
               </a:rPr>
               <a:t>LaunchScreen.storyboard</a:t>
             </a:r>
-            <a:endParaRPr sz="1500" b="1" i="0">
-              <a:solidFill>
-                <a:srgbClr val="F39620"/>
-              </a:solidFill>
-            </a:endParaRPr>
           </a:p>
         </p:txBody>
       </p:sp>
@@ -9227,7 +8809,7 @@
         </p:nvSpPr>
         <p:spPr>
           <a:xfrm>
-            <a:off x="8583295" y="1323340"/>
+            <a:off x="6903720" y="1463040"/>
             <a:ext cx="3108960" cy="4937760"/>
           </a:xfrm>
           <a:prstGeom prst="rect">
@@ -9270,7 +8852,7 @@
         </p:nvSpPr>
         <p:spPr>
           <a:xfrm>
-            <a:off x="9726295" y="2420620"/>
+            <a:off x="8046720" y="2560320"/>
             <a:ext cx="1097280" cy="1097280"/>
           </a:xfrm>
           <a:prstGeom prst="rect">
@@ -9293,11 +8875,6 @@
               </a:rPr>
               <a:t>🌾</a:t>
             </a:r>
-            <a:endParaRPr sz="3600" b="0" i="0">
-              <a:solidFill>
-                <a:srgbClr val="FFFFFF"/>
-              </a:solidFill>
-            </a:endParaRPr>
           </a:p>
         </p:txBody>
       </p:sp>
@@ -9309,7 +8886,7 @@
         </p:nvSpPr>
         <p:spPr>
           <a:xfrm>
-            <a:off x="8674735" y="3609339"/>
+            <a:off x="6995160" y="3749039"/>
             <a:ext cx="2926080" cy="457200"/>
           </a:xfrm>
           <a:prstGeom prst="rect">
@@ -9332,11 +8909,6 @@
               </a:rPr>
               <a:t>SmartFarmer</a:t>
             </a:r>
-            <a:endParaRPr sz="1600" b="1" i="0">
-              <a:solidFill>
-                <a:srgbClr val="FFFFFF"/>
-              </a:solidFill>
-            </a:endParaRPr>
           </a:p>
         </p:txBody>
       </p:sp>
@@ -9348,7 +8920,7 @@
         </p:nvSpPr>
         <p:spPr>
           <a:xfrm>
-            <a:off x="8674735" y="4112260"/>
+            <a:off x="6995160" y="4251960"/>
             <a:ext cx="2926080" cy="640080"/>
           </a:xfrm>
           <a:prstGeom prst="rect">
@@ -9372,11 +8944,6 @@
               <a:t>ជំនួយស្មាតសម្រាប់
 កសិករ</a:t>
             </a:r>
-            <a:endParaRPr sz="1100" b="0" i="0">
-              <a:solidFill>
-                <a:srgbClr val="AAAABB"/>
-              </a:solidFill>
-            </a:endParaRPr>
           </a:p>
         </p:txBody>
       </p:sp>
@@ -9388,17 +8955,17 @@
         </p:nvSpPr>
         <p:spPr>
           <a:xfrm>
-            <a:off x="3125470" y="1417320"/>
-            <a:ext cx="4479290" cy="2695575"/>
-          </a:xfrm>
-          <a:prstGeom prst="rect">
-            <a:avLst/>
-          </a:prstGeom>
-          <a:noFill/>
-        </p:spPr>
-        <p:txBody>
-          <a:bodyPr wrap="square">
-            <a:noAutofit/>
+            <a:off x="6126480" y="2103120"/>
+            <a:ext cx="5669280" cy="2926080"/>
+          </a:xfrm>
+          <a:prstGeom prst="rect">
+            <a:avLst/>
+          </a:prstGeom>
+          <a:noFill/>
+        </p:spPr>
+        <p:txBody>
+          <a:bodyPr wrap="square">
+            <a:spAutoFit/>
           </a:bodyPr>
           <a:lstStyle/>
           <a:p>
@@ -9413,13 +8980,8 @@
                   <a:srgbClr val="FFFFFF"/>
                 </a:solidFill>
               </a:rPr>
-              <a:t>• Use a UIImageView for your logo centred on screen</a:t>
-            </a:r>
-            <a:endParaRPr sz="1300">
-              <a:solidFill>
-                <a:srgbClr val="FFFFFF"/>
-              </a:solidFill>
-            </a:endParaRPr>
+              <a:t>• ប្រើ UIImageView សម្រាប់ logo នៅចំកណ្ដាល</a:t>
+            </a:r>
           </a:p>
           <a:p>
             <a:pPr>
@@ -9433,13 +8995,8 @@
                   <a:srgbClr val="FFFFFF"/>
                 </a:solidFill>
               </a:rPr>
-              <a:t>• Set background colour to match your app theme</a:t>
-            </a:r>
-            <a:endParaRPr sz="1300">
-              <a:solidFill>
-                <a:srgbClr val="FFFFFF"/>
-              </a:solidFill>
-            </a:endParaRPr>
+              <a:t>• កំណត់ background color ឱ្យស្របតាម theme</a:t>
+            </a:r>
           </a:p>
           <a:p>
             <a:pPr>
@@ -9453,13 +9010,8 @@
                   <a:srgbClr val="FFFFFF"/>
                 </a:solidFill>
               </a:rPr>
-              <a:t>• Add CFBundleDisplayName in Info.plist for Khmer name</a:t>
-            </a:r>
-            <a:endParaRPr sz="1300">
-              <a:solidFill>
-                <a:srgbClr val="FFFFFF"/>
-              </a:solidFill>
-            </a:endParaRPr>
+              <a:t>• បន្ថែម CFBundleDisplayName ក្នុង Info.plist ចំពោះឈ្មោះខ្មែរ</a:t>
+            </a:r>
           </a:p>
           <a:p>
             <a:pPr>
@@ -9473,13 +9025,8 @@
                   <a:srgbClr val="FFFFFF"/>
                 </a:solidFill>
               </a:rPr>
-              <a:t>• No animations — LaunchScreen must be static</a:t>
-            </a:r>
-            <a:endParaRPr sz="1300">
-              <a:solidFill>
-                <a:srgbClr val="FFFFFF"/>
-              </a:solidFill>
-            </a:endParaRPr>
+              <a:t>• គ្មាន animations — LaunchScreen ត្រូវ static</a:t>
+            </a:r>
           </a:p>
         </p:txBody>
       </p:sp>
@@ -9492,7 +9039,7 @@
 </file>
 
 <file path=ppt/slides/slide4.xml><?xml version="1.0" encoding="utf-8"?>
-<p:sld xmlns:a="http://schemas.openxmlformats.org/drawingml/2006/main" xmlns:r="http://schemas.openxmlformats.org/officeDocument/2006/relationships" xmlns:p="http://schemas.openxmlformats.org/presentationml/2006/main">
+<p:sld xmlns:a="http://schemas.openxmlformats.org/drawingml/2006/main" xmlns:p="http://schemas.openxmlformats.org/presentationml/2006/main" xmlns:r="http://schemas.openxmlformats.org/officeDocument/2006/relationships">
   <p:cSld>
     <p:bg>
       <p:bgPr>
@@ -9581,13 +9128,8 @@
                   <a:srgbClr val="FFFFFF"/>
                 </a:solidFill>
               </a:rPr>
-              <a:t>⚙️  App Identity — Bundle ID, Name &amp; Version</a:t>
-            </a:r>
-            <a:endParaRPr sz="2600" b="1" i="0">
-              <a:solidFill>
-                <a:srgbClr val="FFFFFF"/>
-              </a:solidFill>
-            </a:endParaRPr>
+              <a:t>⚙️  Identity App — Bundle ID, ឈ្មោះ &amp; Version</a:t>
+            </a:r>
           </a:p>
         </p:txBody>
       </p:sp>
@@ -9751,11 +9293,6 @@
               </a:rPr>
               <a:t>Display Name</a:t>
             </a:r>
-            <a:endParaRPr sz="1300" b="1" i="0">
-              <a:solidFill>
-                <a:srgbClr val="00C9C8"/>
-              </a:solidFill>
-            </a:endParaRPr>
           </a:p>
         </p:txBody>
       </p:sp>
@@ -9790,11 +9327,6 @@
               </a:rPr>
               <a:t>SmartFarmer Assistant</a:t>
             </a:r>
-            <a:endParaRPr sz="1300" b="0" i="0">
-              <a:solidFill>
-                <a:srgbClr val="FFFFFF"/>
-              </a:solidFill>
-            </a:endParaRPr>
           </a:p>
         </p:txBody>
       </p:sp>
@@ -9827,13 +9359,8 @@
                   <a:srgbClr val="AAAABB"/>
                 </a:solidFill>
               </a:rPr>
-              <a:t>Shown under app icon on home screen</a:t>
-            </a:r>
-            <a:endParaRPr sz="1200" b="0" i="0">
-              <a:solidFill>
-                <a:srgbClr val="AAAABB"/>
-              </a:solidFill>
-            </a:endParaRPr>
+              <a:t>បង្ហាញពីក្រោម app icon ផ្ទាំងដើម</a:t>
+            </a:r>
           </a:p>
         </p:txBody>
       </p:sp>
@@ -9997,11 +9524,6 @@
               </a:rPr>
               <a:t>Bundle ID</a:t>
             </a:r>
-            <a:endParaRPr sz="1300" b="1" i="0">
-              <a:solidFill>
-                <a:srgbClr val="00C9C8"/>
-              </a:solidFill>
-            </a:endParaRPr>
           </a:p>
         </p:txBody>
       </p:sp>
@@ -10036,11 +9558,6 @@
               </a:rPr>
               <a:t>com.yourname.smartfarmer</a:t>
             </a:r>
-            <a:endParaRPr sz="1300" b="0" i="0">
-              <a:solidFill>
-                <a:srgbClr val="FFFFFF"/>
-              </a:solidFill>
-            </a:endParaRPr>
           </a:p>
         </p:txBody>
       </p:sp>
@@ -10073,13 +9590,8 @@
                   <a:srgbClr val="AAAABB"/>
                 </a:solidFill>
               </a:rPr>
-              <a:t>Unique — must match App Store Connect exactly</a:t>
-            </a:r>
-            <a:endParaRPr sz="1200" b="0" i="0">
-              <a:solidFill>
-                <a:srgbClr val="AAAABB"/>
-              </a:solidFill>
-            </a:endParaRPr>
+              <a:t>តែមួយ — ត្រូវដូចគ្នា App Store Connect</a:t>
+            </a:r>
           </a:p>
         </p:txBody>
       </p:sp>
@@ -10243,11 +9755,6 @@
               </a:rPr>
               <a:t>Version</a:t>
             </a:r>
-            <a:endParaRPr sz="1300" b="1" i="0">
-              <a:solidFill>
-                <a:srgbClr val="00C9C8"/>
-              </a:solidFill>
-            </a:endParaRPr>
           </a:p>
         </p:txBody>
       </p:sp>
@@ -10282,11 +9789,6 @@
               </a:rPr>
               <a:t>1.0.0</a:t>
             </a:r>
-            <a:endParaRPr sz="1300" b="0" i="0">
-              <a:solidFill>
-                <a:srgbClr val="FFFFFF"/>
-              </a:solidFill>
-            </a:endParaRPr>
           </a:p>
         </p:txBody>
       </p:sp>
@@ -10319,13 +9821,8 @@
                   <a:srgbClr val="AAAABB"/>
                 </a:solidFill>
               </a:rPr>
-              <a:t>Marketing version shown to users</a:t>
-            </a:r>
-            <a:endParaRPr sz="1200" b="0" i="0">
-              <a:solidFill>
-                <a:srgbClr val="AAAABB"/>
-              </a:solidFill>
-            </a:endParaRPr>
+              <a:t>Version marketing បង្ហាញដល់ users</a:t>
+            </a:r>
           </a:p>
         </p:txBody>
       </p:sp>
@@ -10489,11 +9986,6 @@
               </a:rPr>
               <a:t>Build</a:t>
             </a:r>
-            <a:endParaRPr sz="1300" b="1" i="0">
-              <a:solidFill>
-                <a:srgbClr val="00C9C8"/>
-              </a:solidFill>
-            </a:endParaRPr>
           </a:p>
         </p:txBody>
       </p:sp>
@@ -10528,11 +10020,6 @@
               </a:rPr>
               <a:t>1</a:t>
             </a:r>
-            <a:endParaRPr sz="1300" b="0" i="0">
-              <a:solidFill>
-                <a:srgbClr val="FFFFFF"/>
-              </a:solidFill>
-            </a:endParaRPr>
           </a:p>
         </p:txBody>
       </p:sp>
@@ -10565,13 +10052,8 @@
                   <a:srgbClr val="AAAABB"/>
                 </a:solidFill>
               </a:rPr>
-              <a:t>Internal build number — increment every upload</a:t>
-            </a:r>
-            <a:endParaRPr sz="1200" b="0" i="0">
-              <a:solidFill>
-                <a:srgbClr val="AAAABB"/>
-              </a:solidFill>
-            </a:endParaRPr>
+              <a:t>Build number ខាងក្នុង — បង្កើនរៀងរាល់ upload</a:t>
+            </a:r>
           </a:p>
         </p:txBody>
       </p:sp>
@@ -10735,11 +10217,6 @@
               </a:rPr>
               <a:t>Min Deployment</a:t>
             </a:r>
-            <a:endParaRPr sz="1300" b="1" i="0">
-              <a:solidFill>
-                <a:srgbClr val="00C9C8"/>
-              </a:solidFill>
-            </a:endParaRPr>
           </a:p>
         </p:txBody>
       </p:sp>
@@ -10774,11 +10251,6 @@
               </a:rPr>
               <a:t>iOS 13.0</a:t>
             </a:r>
-            <a:endParaRPr sz="1300" b="0" i="0">
-              <a:solidFill>
-                <a:srgbClr val="FFFFFF"/>
-              </a:solidFill>
-            </a:endParaRPr>
           </a:p>
         </p:txBody>
       </p:sp>
@@ -10811,13 +10283,8 @@
                   <a:srgbClr val="AAAABB"/>
                 </a:solidFill>
               </a:rPr>
-              <a:t>Covers 99 %+ of active iPhones</a:t>
-            </a:r>
-            <a:endParaRPr sz="1200" b="0" i="0">
-              <a:solidFill>
-                <a:srgbClr val="AAAABB"/>
-              </a:solidFill>
-            </a:endParaRPr>
+              <a:t>គ្របដណ្ដប់ 99%+ iPhones ដំណើរការ</a:t>
+            </a:r>
           </a:p>
         </p:txBody>
       </p:sp>
@@ -10981,11 +10448,6 @@
               </a:rPr>
               <a:t>Device Family</a:t>
             </a:r>
-            <a:endParaRPr sz="1300" b="1" i="0">
-              <a:solidFill>
-                <a:srgbClr val="00C9C8"/>
-              </a:solidFill>
-            </a:endParaRPr>
           </a:p>
         </p:txBody>
       </p:sp>
@@ -11020,11 +10482,6 @@
               </a:rPr>
               <a:t>iPhone only</a:t>
             </a:r>
-            <a:endParaRPr sz="1300" b="0" i="0">
-              <a:solidFill>
-                <a:srgbClr val="FFFFFF"/>
-              </a:solidFill>
-            </a:endParaRPr>
           </a:p>
         </p:txBody>
       </p:sp>
@@ -11057,13 +10514,8 @@
                   <a:srgbClr val="AAAABB"/>
                 </a:solidFill>
               </a:rPr>
-              <a:t>Set iPad if you want universal</a:t>
-            </a:r>
-            <a:endParaRPr sz="1200" b="0" i="0">
-              <a:solidFill>
-                <a:srgbClr val="AAAABB"/>
-              </a:solidFill>
-            </a:endParaRPr>
+              <a:t>កំណត់ iPad បើចង់ universal</a:t>
+            </a:r>
           </a:p>
         </p:txBody>
       </p:sp>
@@ -11227,11 +10679,6 @@
               </a:rPr>
               <a:t>Orientations</a:t>
             </a:r>
-            <a:endParaRPr sz="1300" b="1" i="0">
-              <a:solidFill>
-                <a:srgbClr val="00C9C8"/>
-              </a:solidFill>
-            </a:endParaRPr>
           </a:p>
         </p:txBody>
       </p:sp>
@@ -11266,11 +10713,6 @@
               </a:rPr>
               <a:t>Portrait only</a:t>
             </a:r>
-            <a:endParaRPr sz="1300" b="0" i="0">
-              <a:solidFill>
-                <a:srgbClr val="FFFFFF"/>
-              </a:solidFill>
-            </a:endParaRPr>
           </a:p>
         </p:txBody>
       </p:sp>
@@ -11303,13 +10745,8 @@
                   <a:srgbClr val="AAAABB"/>
                 </a:solidFill>
               </a:rPr>
-              <a:t>Lock for farmer use — avoid accidental rotation</a:t>
-            </a:r>
-            <a:endParaRPr sz="1200" b="0" i="0">
-              <a:solidFill>
-                <a:srgbClr val="AAAABB"/>
-              </a:solidFill>
-            </a:endParaRPr>
+              <a:t>Lock ដើម្បីប្រើ — ការពារ rotation ចៃដន្យ</a:t>
+            </a:r>
           </a:p>
         </p:txBody>
       </p:sp>
@@ -11342,13 +10779,8 @@
                   <a:srgbClr val="AAAABB"/>
                 </a:solidFill>
               </a:rPr>
-              <a:t>Setting</a:t>
-            </a:r>
-            <a:endParaRPr sz="1200" b="1" i="0">
-              <a:solidFill>
-                <a:srgbClr val="AAAABB"/>
-              </a:solidFill>
-            </a:endParaRPr>
+              <a:t>ការកំណត់</a:t>
+            </a:r>
           </a:p>
         </p:txBody>
       </p:sp>
@@ -11381,13 +10813,8 @@
                   <a:srgbClr val="AAAABB"/>
                 </a:solidFill>
               </a:rPr>
-              <a:t>Value</a:t>
-            </a:r>
-            <a:endParaRPr sz="1200" b="1" i="0">
-              <a:solidFill>
-                <a:srgbClr val="AAAABB"/>
-              </a:solidFill>
-            </a:endParaRPr>
+              <a:t>តម្លៃ</a:t>
+            </a:r>
           </a:p>
         </p:txBody>
       </p:sp>
@@ -11420,13 +10847,8 @@
                   <a:srgbClr val="AAAABB"/>
                 </a:solidFill>
               </a:rPr>
-              <a:t>Tip</a:t>
-            </a:r>
-            <a:endParaRPr sz="1200" b="1" i="0">
-              <a:solidFill>
-                <a:srgbClr val="AAAABB"/>
-              </a:solidFill>
-            </a:endParaRPr>
+              <a:t>ដំបូន្មាន</a:t>
+            </a:r>
           </a:p>
         </p:txBody>
       </p:sp>
@@ -11439,7 +10861,7 @@
 </file>
 
 <file path=ppt/slides/slide5.xml><?xml version="1.0" encoding="utf-8"?>
-<p:sld xmlns:a="http://schemas.openxmlformats.org/drawingml/2006/main" xmlns:r="http://schemas.openxmlformats.org/officeDocument/2006/relationships" xmlns:p="http://schemas.openxmlformats.org/presentationml/2006/main">
+<p:sld xmlns:a="http://schemas.openxmlformats.org/drawingml/2006/main" xmlns:p="http://schemas.openxmlformats.org/presentationml/2006/main" xmlns:r="http://schemas.openxmlformats.org/officeDocument/2006/relationships">
   <p:cSld>
     <p:bg>
       <p:bgPr>
@@ -11528,13 +10950,8 @@
                   <a:srgbClr val="FFFFFF"/>
                 </a:solidFill>
               </a:rPr>
-              <a:t>🚀  TestFlight Setup — Step by Step</a:t>
-            </a:r>
-            <a:endParaRPr sz="2600" b="1" i="0">
-              <a:solidFill>
-                <a:srgbClr val="FFFFFF"/>
-              </a:solidFill>
-            </a:endParaRPr>
+              <a:t>🚀  ការរៀបចំ TestFlight — ជំហានម្ដងម្ដង</a:t>
+            </a:r>
           </a:p>
         </p:txBody>
       </p:sp>
@@ -11610,13 +11027,8 @@
                   <a:srgbClr val="FFFFFF"/>
                 </a:solidFill>
               </a:rPr>
-              <a:t>Step 1</a:t>
-            </a:r>
-            <a:endParaRPr sz="1100" b="1" i="0">
-              <a:solidFill>
-                <a:srgbClr val="FFFFFF"/>
-              </a:solidFill>
-            </a:endParaRPr>
+              <a:t>ជំហាន 1</a:t>
+            </a:r>
           </a:p>
         </p:txBody>
       </p:sp>
@@ -11692,13 +11104,8 @@
                   <a:srgbClr val="00C9C8"/>
                 </a:solidFill>
               </a:rPr>
-              <a:t>Create App Record in App Store Connect</a:t>
-            </a:r>
-            <a:endParaRPr sz="1400" b="1" i="0">
-              <a:solidFill>
-                <a:srgbClr val="00C9C8"/>
-              </a:solidFill>
-            </a:endParaRPr>
+              <a:t>បង្កើត App Record ក្នុង App Store Connect</a:t>
+            </a:r>
           </a:p>
         </p:txBody>
       </p:sp>
@@ -11732,13 +11139,8 @@
                 </a:solidFill>
               </a:rPr>
               <a:t>appstoreconnect.apple.com → My Apps → + → New App
-Fill: Platform (iOS), Name, Bundle ID, Primary Language, SKU</a:t>
-            </a:r>
-            <a:endParaRPr sz="1200" b="0" i="0">
-              <a:solidFill>
-                <a:srgbClr val="AAAABB"/>
-              </a:solidFill>
-            </a:endParaRPr>
+បំពេញ: Platform (iOS), Name, Bundle ID, Primary Language, SKU</a:t>
+            </a:r>
           </a:p>
         </p:txBody>
       </p:sp>
@@ -11814,13 +11216,8 @@
                   <a:srgbClr val="FFFFFF"/>
                 </a:solidFill>
               </a:rPr>
-              <a:t>Step 2</a:t>
-            </a:r>
-            <a:endParaRPr sz="1100" b="1" i="0">
-              <a:solidFill>
-                <a:srgbClr val="FFFFFF"/>
-              </a:solidFill>
-            </a:endParaRPr>
+              <a:t>ជំហាន 2</a:t>
+            </a:r>
           </a:p>
         </p:txBody>
       </p:sp>
@@ -11896,13 +11293,8 @@
                   <a:srgbClr val="287DFA"/>
                 </a:solidFill>
               </a:rPr>
-              <a:t>Archive in Xcode</a:t>
-            </a:r>
-            <a:endParaRPr sz="1400" b="1" i="0">
-              <a:solidFill>
-                <a:srgbClr val="287DFA"/>
-              </a:solidFill>
-            </a:endParaRPr>
+              <a:t>Archive ក្នុង Xcode</a:t>
+            </a:r>
           </a:p>
         </p:txBody>
       </p:sp>
@@ -11935,14 +11327,9 @@
                   <a:srgbClr val="AAAABB"/>
                 </a:solidFill>
               </a:rPr>
-              <a:t>Select 'Any iOS Device (arm64)' as destination
-Product → Archive → Xcode Organizer opens automatically</a:t>
-            </a:r>
-            <a:endParaRPr sz="1200" b="0" i="0">
-              <a:solidFill>
-                <a:srgbClr val="AAAABB"/>
-              </a:solidFill>
-            </a:endParaRPr>
+              <a:t>ជ្រើស 'Any iOS Device (arm64)'
+Product → Archive → Xcode Organizer បើកស្វ័យ</a:t>
+            </a:r>
           </a:p>
         </p:txBody>
       </p:sp>
@@ -12018,13 +11405,8 @@
                   <a:srgbClr val="FFFFFF"/>
                 </a:solidFill>
               </a:rPr>
-              <a:t>Step 3</a:t>
-            </a:r>
-            <a:endParaRPr sz="1100" b="1" i="0">
-              <a:solidFill>
-                <a:srgbClr val="FFFFFF"/>
-              </a:solidFill>
-            </a:endParaRPr>
+              <a:t>ជំហាន 3</a:t>
+            </a:r>
           </a:p>
         </p:txBody>
       </p:sp>
@@ -12100,13 +11482,8 @@
                   <a:srgbClr val="1BB889"/>
                 </a:solidFill>
               </a:rPr>
-              <a:t>Upload to App Store Connect</a:t>
-            </a:r>
-            <a:endParaRPr sz="1400" b="1" i="0">
-              <a:solidFill>
-                <a:srgbClr val="1BB889"/>
-              </a:solidFill>
-            </a:endParaRPr>
+              <a:t>Upload ទៅ App Store Connect</a:t>
+            </a:r>
           </a:p>
         </p:txBody>
       </p:sp>
@@ -12139,14 +11516,9 @@
                   <a:srgbClr val="AAAABB"/>
                 </a:solidFill>
               </a:rPr>
-              <a:t>In Organizer: Distribute App → App Store Connect → Upload
-Enable 'Upload your app's symbols' for crash reports</a:t>
-            </a:r>
-            <a:endParaRPr sz="1200" b="0" i="0">
-              <a:solidFill>
-                <a:srgbClr val="AAAABB"/>
-              </a:solidFill>
-            </a:endParaRPr>
+              <a:t>ក្នុង Organizer: Distribute App → Upload
+បើក 'Upload your app's symbols'</a:t>
+            </a:r>
           </a:p>
         </p:txBody>
       </p:sp>
@@ -12222,13 +11594,8 @@
                   <a:srgbClr val="FFFFFF"/>
                 </a:solidFill>
               </a:rPr>
-              <a:t>Step 4</a:t>
-            </a:r>
-            <a:endParaRPr sz="1100" b="1" i="0">
-              <a:solidFill>
-                <a:srgbClr val="FFFFFF"/>
-              </a:solidFill>
-            </a:endParaRPr>
+              <a:t>ជំហាន 4</a:t>
+            </a:r>
           </a:p>
         </p:txBody>
       </p:sp>
@@ -12304,13 +11671,8 @@
                   <a:srgbClr val="F39620"/>
                 </a:solidFill>
               </a:rPr>
-              <a:t>Add Beta Testers</a:t>
-            </a:r>
-            <a:endParaRPr sz="1400" b="1" i="0">
-              <a:solidFill>
-                <a:srgbClr val="F39620"/>
-              </a:solidFill>
-            </a:endParaRPr>
+              <a:t>បន្ថែម Beta Testers</a:t>
+            </a:r>
           </a:p>
         </p:txBody>
       </p:sp>
@@ -12343,14 +11705,9 @@
                   <a:srgbClr val="AAAABB"/>
                 </a:solidFill>
               </a:rPr>
-              <a:t>App Store Connect → TestFlight → Internal/External Group
-Invite by email — farmers receive install link via email</a:t>
-            </a:r>
-            <a:endParaRPr sz="1200" b="0" i="0">
-              <a:solidFill>
-                <a:srgbClr val="AAAABB"/>
-              </a:solidFill>
-            </a:endParaRPr>
+              <a:t>App Store Connect → TestFlight → Group
+អញ្ជើញ email — កសិករទទួល link ដំឡើង</a:t>
+            </a:r>
           </a:p>
         </p:txBody>
       </p:sp>
@@ -12426,13 +11783,8 @@
                   <a:srgbClr val="FFFFFF"/>
                 </a:solidFill>
               </a:rPr>
-              <a:t>Step 5</a:t>
-            </a:r>
-            <a:endParaRPr sz="1100" b="1" i="0">
-              <a:solidFill>
-                <a:srgbClr val="FFFFFF"/>
-              </a:solidFill>
-            </a:endParaRPr>
+              <a:t>ជំហាន 5</a:t>
+            </a:r>
           </a:p>
         </p:txBody>
       </p:sp>
@@ -12508,13 +11860,8 @@
                   <a:srgbClr val="8E44AD"/>
                 </a:solidFill>
               </a:rPr>
-              <a:t>Monitor &amp; Collect Feedback</a:t>
-            </a:r>
-            <a:endParaRPr sz="1400" b="1" i="0">
-              <a:solidFill>
-                <a:srgbClr val="8E44AD"/>
-              </a:solidFill>
-            </a:endParaRPr>
+              <a:t>ត្រួតពិនិត្យ &amp; ប្រមូល Feedback</a:t>
+            </a:r>
           </a:p>
         </p:txBody>
       </p:sp>
@@ -12547,14 +11894,9 @@
                   <a:srgbClr val="AAAABB"/>
                 </a:solidFill>
               </a:rPr>
-              <a:t>TestFlight app shows crash logs, tester feedback screenshots
-Testers long-press anywhere → Send Feedback with screenshot</a:t>
-            </a:r>
-            <a:endParaRPr sz="1200" b="0" i="0">
-              <a:solidFill>
-                <a:srgbClr val="AAAABB"/>
-              </a:solidFill>
-            </a:endParaRPr>
+              <a:t>TestFlight បង្ហាញ crash logs, screenshots feedback
+Testers long-press → Send Feedback ជាមួយ screenshot</a:t>
+            </a:r>
           </a:p>
         </p:txBody>
       </p:sp>
@@ -12567,7 +11909,7 @@
 </file>
 
 <file path=ppt/slides/slide6.xml><?xml version="1.0" encoding="utf-8"?>
-<p:sld xmlns:a="http://schemas.openxmlformats.org/drawingml/2006/main" xmlns:r="http://schemas.openxmlformats.org/officeDocument/2006/relationships" xmlns:p="http://schemas.openxmlformats.org/presentationml/2006/main">
+<p:sld xmlns:a="http://schemas.openxmlformats.org/drawingml/2006/main" xmlns:p="http://schemas.openxmlformats.org/presentationml/2006/main" xmlns:r="http://schemas.openxmlformats.org/officeDocument/2006/relationships">
   <p:cSld>
     <p:bg>
       <p:bgPr>
@@ -12656,13 +11998,8 @@
                   <a:srgbClr val="FFFFFF"/>
                 </a:solidFill>
               </a:rPr>
-              <a:t>📖  In-App User Guide Screen</a:t>
-            </a:r>
-            <a:endParaRPr sz="2600" b="1" i="0">
-              <a:solidFill>
-                <a:srgbClr val="FFFFFF"/>
-              </a:solidFill>
-            </a:endParaRPr>
+              <a:t>📖  ផ្ទាំងណែនាំ In-App</a:t>
+            </a:r>
           </a:p>
         </p:txBody>
       </p:sp>
@@ -12736,16 +12073,10 @@
                 <a:solidFill>
                   <a:srgbClr val="A8D8FF"/>
                 </a:solidFill>
-                <a:latin typeface="Courier New" panose="02070609020205090404"/>
+                <a:latin typeface="Courier New"/>
               </a:rPr>
               <a:t>struct UserGuideView: View {</a:t>
             </a:r>
-            <a:endParaRPr sz="1100">
-              <a:solidFill>
-                <a:srgbClr val="A8D8FF"/>
-              </a:solidFill>
-              <a:latin typeface="Courier New" panose="02070609020205090404"/>
-            </a:endParaRPr>
           </a:p>
           <a:p>
             <a:r>
@@ -12753,16 +12084,10 @@
                 <a:solidFill>
                   <a:srgbClr val="A8D8FF"/>
                 </a:solidFill>
-                <a:latin typeface="Courier New" panose="02070609020205090404"/>
+                <a:latin typeface="Courier New"/>
               </a:rPr>
               <a:t>    let sections: [GuideSection] = [</a:t>
             </a:r>
-            <a:endParaRPr sz="1100">
-              <a:solidFill>
-                <a:srgbClr val="A8D8FF"/>
-              </a:solidFill>
-              <a:latin typeface="Courier New" panose="02070609020205090404"/>
-            </a:endParaRPr>
           </a:p>
           <a:p>
             <a:r>
@@ -12770,16 +12095,10 @@
                 <a:solidFill>
                   <a:srgbClr val="A8D8FF"/>
                 </a:solidFill>
-                <a:latin typeface="Courier New" panose="02070609020205090404"/>
+                <a:latin typeface="Courier New"/>
               </a:rPr>
               <a:t>        .init(icon: "dollarsign.circle.fill",</a:t>
             </a:r>
-            <a:endParaRPr sz="1100">
-              <a:solidFill>
-                <a:srgbClr val="A8D8FF"/>
-              </a:solidFill>
-              <a:latin typeface="Courier New" panose="02070609020205090404"/>
-            </a:endParaRPr>
           </a:p>
           <a:p>
             <a:r>
@@ -12787,16 +12106,10 @@
                 <a:solidFill>
                   <a:srgbClr val="A8D8FF"/>
                 </a:solidFill>
-                <a:latin typeface="Courier New" panose="02070609020205090404"/>
+                <a:latin typeface="Courier New"/>
               </a:rPr>
               <a:t>              color: .green,</a:t>
             </a:r>
-            <a:endParaRPr sz="1100">
-              <a:solidFill>
-                <a:srgbClr val="A8D8FF"/>
-              </a:solidFill>
-              <a:latin typeface="Courier New" panose="02070609020205090404"/>
-            </a:endParaRPr>
           </a:p>
           <a:p>
             <a:r>
@@ -12804,16 +12117,10 @@
                 <a:solidFill>
                   <a:srgbClr val="A8D8FF"/>
                 </a:solidFill>
-                <a:latin typeface="Courier New" panose="02070609020205090404"/>
+                <a:latin typeface="Courier New"/>
               </a:rPr>
               <a:t>              title: "ការគ្រប់គ្រងហិរញ្ញវត្ថុ",</a:t>
             </a:r>
-            <a:endParaRPr sz="1100">
-              <a:solidFill>
-                <a:srgbClr val="A8D8FF"/>
-              </a:solidFill>
-              <a:latin typeface="Courier New" panose="02070609020205090404"/>
-            </a:endParaRPr>
           </a:p>
           <a:p>
             <a:r>
@@ -12821,16 +12128,10 @@
                 <a:solidFill>
                   <a:srgbClr val="A8D8FF"/>
                 </a:solidFill>
-                <a:latin typeface="Courier New" panose="02070609020205090404"/>
+                <a:latin typeface="Courier New"/>
               </a:rPr>
               <a:t>              tips: ["ចុច + ដើម្បីបន្ថែមប្រតិបត្តិការ",</a:t>
             </a:r>
-            <a:endParaRPr sz="1100">
-              <a:solidFill>
-                <a:srgbClr val="A8D8FF"/>
-              </a:solidFill>
-              <a:latin typeface="Courier New" panose="02070609020205090404"/>
-            </a:endParaRPr>
           </a:p>
           <a:p>
             <a:r>
@@ -12838,16 +12139,10 @@
                 <a:solidFill>
                   <a:srgbClr val="A8D8FF"/>
                 </a:solidFill>
-                <a:latin typeface="Courier New" panose="02070609020205090404"/>
+                <a:latin typeface="Courier New"/>
               </a:rPr>
               <a:t>                     "ជ្រើសប្រភេទ: ចំណូល ឬ ចំណាយ",</a:t>
             </a:r>
-            <a:endParaRPr sz="1100">
-              <a:solidFill>
-                <a:srgbClr val="A8D8FF"/>
-              </a:solidFill>
-              <a:latin typeface="Courier New" panose="02070609020205090404"/>
-            </a:endParaRPr>
           </a:p>
           <a:p>
             <a:r>
@@ -12855,16 +12150,10 @@
                 <a:solidFill>
                   <a:srgbClr val="A8D8FF"/>
                 </a:solidFill>
-                <a:latin typeface="Courier New" panose="02070609020205090404"/>
+                <a:latin typeface="Courier New"/>
               </a:rPr>
               <a:t>                     "ប្រើតម្រងដើម្បីមើលតាមប្រភេទ"]),</a:t>
             </a:r>
-            <a:endParaRPr sz="1100">
-              <a:solidFill>
-                <a:srgbClr val="A8D8FF"/>
-              </a:solidFill>
-              <a:latin typeface="Courier New" panose="02070609020205090404"/>
-            </a:endParaRPr>
           </a:p>
           <a:p>
             <a:r>
@@ -12872,16 +12161,10 @@
                 <a:solidFill>
                   <a:srgbClr val="A8D8FF"/>
                 </a:solidFill>
-                <a:latin typeface="Courier New" panose="02070609020205090404"/>
+                <a:latin typeface="Courier New"/>
               </a:rPr>
               <a:t>        .init(icon: "calendar.badge.plus",</a:t>
             </a:r>
-            <a:endParaRPr sz="1100">
-              <a:solidFill>
-                <a:srgbClr val="A8D8FF"/>
-              </a:solidFill>
-              <a:latin typeface="Courier New" panose="02070609020205090404"/>
-            </a:endParaRPr>
           </a:p>
           <a:p>
             <a:r>
@@ -12889,16 +12172,10 @@
                 <a:solidFill>
                   <a:srgbClr val="A8D8FF"/>
                 </a:solidFill>
-                <a:latin typeface="Courier New" panose="02070609020205090404"/>
+                <a:latin typeface="Courier New"/>
               </a:rPr>
               <a:t>              color: .blue,</a:t>
             </a:r>
-            <a:endParaRPr sz="1100">
-              <a:solidFill>
-                <a:srgbClr val="A8D8FF"/>
-              </a:solidFill>
-              <a:latin typeface="Courier New" panose="02070609020205090404"/>
-            </a:endParaRPr>
           </a:p>
           <a:p>
             <a:r>
@@ -12906,16 +12183,10 @@
                 <a:solidFill>
                   <a:srgbClr val="A8D8FF"/>
                 </a:solidFill>
-                <a:latin typeface="Courier New" panose="02070609020205090404"/>
+                <a:latin typeface="Courier New"/>
               </a:rPr>
               <a:t>              title: "ប្រតិទិន &amp; ការជូនដំណឹង",</a:t>
             </a:r>
-            <a:endParaRPr sz="1100">
-              <a:solidFill>
-                <a:srgbClr val="A8D8FF"/>
-              </a:solidFill>
-              <a:latin typeface="Courier New" panose="02070609020205090404"/>
-            </a:endParaRPr>
           </a:p>
           <a:p>
             <a:r>
@@ -12923,16 +12194,10 @@
                 <a:solidFill>
                   <a:srgbClr val="A8D8FF"/>
                 </a:solidFill>
-                <a:latin typeface="Courier New" panose="02070609020205090404"/>
+                <a:latin typeface="Courier New"/>
               </a:rPr>
               <a:t>              tips: ["កំណត់ការរំលឹកចម្ការ",</a:t>
             </a:r>
-            <a:endParaRPr sz="1100">
-              <a:solidFill>
-                <a:srgbClr val="A8D8FF"/>
-              </a:solidFill>
-              <a:latin typeface="Courier New" panose="02070609020205090404"/>
-            </a:endParaRPr>
           </a:p>
           <a:p>
             <a:r>
@@ -12940,16 +12205,10 @@
                 <a:solidFill>
                   <a:srgbClr val="A8D8FF"/>
                 </a:solidFill>
-                <a:latin typeface="Courier New" panose="02070609020205090404"/>
+                <a:latin typeface="Courier New"/>
               </a:rPr>
               <a:t>                     "ការជូនដំណឹងមកមុន ១ ថ្ងៃ"]),</a:t>
             </a:r>
-            <a:endParaRPr sz="1100">
-              <a:solidFill>
-                <a:srgbClr val="A8D8FF"/>
-              </a:solidFill>
-              <a:latin typeface="Courier New" panose="02070609020205090404"/>
-            </a:endParaRPr>
           </a:p>
           <a:p>
             <a:r>
@@ -12957,16 +12216,10 @@
                 <a:solidFill>
                   <a:srgbClr val="A8D8FF"/>
                 </a:solidFill>
-                <a:latin typeface="Courier New" panose="02070609020205090404"/>
+                <a:latin typeface="Courier New"/>
               </a:rPr>
               <a:t>        // ... PestGuide, Journal sections</a:t>
             </a:r>
-            <a:endParaRPr sz="1100">
-              <a:solidFill>
-                <a:srgbClr val="A8D8FF"/>
-              </a:solidFill>
-              <a:latin typeface="Courier New" panose="02070609020205090404"/>
-            </a:endParaRPr>
           </a:p>
           <a:p>
             <a:r>
@@ -12974,16 +12227,10 @@
                 <a:solidFill>
                   <a:srgbClr val="A8D8FF"/>
                 </a:solidFill>
-                <a:latin typeface="Courier New" panose="02070609020205090404"/>
+                <a:latin typeface="Courier New"/>
               </a:rPr>
               <a:t>    ]</a:t>
             </a:r>
-            <a:endParaRPr sz="1100">
-              <a:solidFill>
-                <a:srgbClr val="A8D8FF"/>
-              </a:solidFill>
-              <a:latin typeface="Courier New" panose="02070609020205090404"/>
-            </a:endParaRPr>
           </a:p>
           <a:p>
             <a:r>
@@ -12991,16 +12238,10 @@
                 <a:solidFill>
                   <a:srgbClr val="A8D8FF"/>
                 </a:solidFill>
-                <a:latin typeface="Courier New" panose="02070609020205090404"/>
+                <a:latin typeface="Courier New"/>
               </a:rPr>
               <a:t>    var body: some View {</a:t>
             </a:r>
-            <a:endParaRPr sz="1100">
-              <a:solidFill>
-                <a:srgbClr val="A8D8FF"/>
-              </a:solidFill>
-              <a:latin typeface="Courier New" panose="02070609020205090404"/>
-            </a:endParaRPr>
           </a:p>
           <a:p>
             <a:r>
@@ -13008,16 +12249,10 @@
                 <a:solidFill>
                   <a:srgbClr val="A8D8FF"/>
                 </a:solidFill>
-                <a:latin typeface="Courier New" panose="02070609020205090404"/>
+                <a:latin typeface="Courier New"/>
               </a:rPr>
               <a:t>        NavigationView {</a:t>
             </a:r>
-            <a:endParaRPr sz="1100">
-              <a:solidFill>
-                <a:srgbClr val="A8D8FF"/>
-              </a:solidFill>
-              <a:latin typeface="Courier New" panose="02070609020205090404"/>
-            </a:endParaRPr>
           </a:p>
           <a:p>
             <a:r>
@@ -13025,16 +12260,10 @@
                 <a:solidFill>
                   <a:srgbClr val="A8D8FF"/>
                 </a:solidFill>
-                <a:latin typeface="Courier New" panose="02070609020205090404"/>
+                <a:latin typeface="Courier New"/>
               </a:rPr>
               <a:t>            List(sections) { section in</a:t>
             </a:r>
-            <a:endParaRPr sz="1100">
-              <a:solidFill>
-                <a:srgbClr val="A8D8FF"/>
-              </a:solidFill>
-              <a:latin typeface="Courier New" panose="02070609020205090404"/>
-            </a:endParaRPr>
           </a:p>
           <a:p>
             <a:r>
@@ -13042,16 +12271,10 @@
                 <a:solidFill>
                   <a:srgbClr val="A8D8FF"/>
                 </a:solidFill>
-                <a:latin typeface="Courier New" panose="02070609020205090404"/>
+                <a:latin typeface="Courier New"/>
               </a:rPr>
               <a:t>                GuideSectionRow(section: section)</a:t>
             </a:r>
-            <a:endParaRPr sz="1100">
-              <a:solidFill>
-                <a:srgbClr val="A8D8FF"/>
-              </a:solidFill>
-              <a:latin typeface="Courier New" panose="02070609020205090404"/>
-            </a:endParaRPr>
           </a:p>
           <a:p>
             <a:r>
@@ -13059,16 +12282,10 @@
                 <a:solidFill>
                   <a:srgbClr val="A8D8FF"/>
                 </a:solidFill>
-                <a:latin typeface="Courier New" panose="02070609020205090404"/>
+                <a:latin typeface="Courier New"/>
               </a:rPr>
               <a:t>            }</a:t>
             </a:r>
-            <a:endParaRPr sz="1100">
-              <a:solidFill>
-                <a:srgbClr val="A8D8FF"/>
-              </a:solidFill>
-              <a:latin typeface="Courier New" panose="02070609020205090404"/>
-            </a:endParaRPr>
           </a:p>
           <a:p>
             <a:r>
@@ -13076,16 +12293,10 @@
                 <a:solidFill>
                   <a:srgbClr val="A8D8FF"/>
                 </a:solidFill>
-                <a:latin typeface="Courier New" panose="02070609020205090404"/>
+                <a:latin typeface="Courier New"/>
               </a:rPr>
               <a:t>            .navigationTitle("ការណែនាំប្រើប្រាស់")</a:t>
             </a:r>
-            <a:endParaRPr sz="1100">
-              <a:solidFill>
-                <a:srgbClr val="A8D8FF"/>
-              </a:solidFill>
-              <a:latin typeface="Courier New" panose="02070609020205090404"/>
-            </a:endParaRPr>
           </a:p>
           <a:p>
             <a:r>
@@ -13093,16 +12304,10 @@
                 <a:solidFill>
                   <a:srgbClr val="A8D8FF"/>
                 </a:solidFill>
-                <a:latin typeface="Courier New" panose="02070609020205090404"/>
+                <a:latin typeface="Courier New"/>
               </a:rPr>
               <a:t>        }</a:t>
             </a:r>
-            <a:endParaRPr sz="1100">
-              <a:solidFill>
-                <a:srgbClr val="A8D8FF"/>
-              </a:solidFill>
-              <a:latin typeface="Courier New" panose="02070609020205090404"/>
-            </a:endParaRPr>
           </a:p>
           <a:p>
             <a:r>
@@ -13110,16 +12315,10 @@
                 <a:solidFill>
                   <a:srgbClr val="A8D8FF"/>
                 </a:solidFill>
-                <a:latin typeface="Courier New" panose="02070609020205090404"/>
+                <a:latin typeface="Courier New"/>
               </a:rPr>
               <a:t>    }</a:t>
             </a:r>
-            <a:endParaRPr sz="1100">
-              <a:solidFill>
-                <a:srgbClr val="A8D8FF"/>
-              </a:solidFill>
-              <a:latin typeface="Courier New" panose="02070609020205090404"/>
-            </a:endParaRPr>
           </a:p>
           <a:p>
             <a:r>
@@ -13127,16 +12326,10 @@
                 <a:solidFill>
                   <a:srgbClr val="A8D8FF"/>
                 </a:solidFill>
-                <a:latin typeface="Courier New" panose="02070609020205090404"/>
+                <a:latin typeface="Courier New"/>
               </a:rPr>
               <a:t>}</a:t>
             </a:r>
-            <a:endParaRPr sz="1100">
-              <a:solidFill>
-                <a:srgbClr val="A8D8FF"/>
-              </a:solidFill>
-              <a:latin typeface="Courier New" panose="02070609020205090404"/>
-            </a:endParaRPr>
           </a:p>
         </p:txBody>
       </p:sp>
@@ -13169,13 +12362,8 @@
                   <a:srgbClr val="1BB889"/>
                 </a:solidFill>
               </a:rPr>
-              <a:t>UX Best Practices</a:t>
-            </a:r>
-            <a:endParaRPr sz="1600" b="1" i="0">
-              <a:solidFill>
-                <a:srgbClr val="1BB889"/>
-              </a:solidFill>
-            </a:endParaRPr>
+              <a:t>ការអនុវត្ត UX ល្អ</a:t>
+            </a:r>
           </a:p>
         </p:txBody>
       </p:sp>
@@ -13251,13 +12439,8 @@
                   <a:srgbClr val="1BB889"/>
                 </a:solidFill>
               </a:rPr>
-              <a:t>Keep it short</a:t>
-            </a:r>
-            <a:endParaRPr sz="1300" b="1" i="0">
-              <a:solidFill>
-                <a:srgbClr val="1BB889"/>
-              </a:solidFill>
-            </a:endParaRPr>
+              <a:t>រក្សាភ្លឺ</a:t>
+            </a:r>
           </a:p>
         </p:txBody>
       </p:sp>
@@ -13290,14 +12473,9 @@
                   <a:srgbClr val="AAAABB"/>
                 </a:solidFill>
               </a:rPr>
-              <a:t>3-4 bullet tips per feature
-— farmers won't read long text</a:t>
-            </a:r>
-            <a:endParaRPr sz="1200" b="0" i="0">
-              <a:solidFill>
-                <a:srgbClr val="AAAABB"/>
-              </a:solidFill>
-            </a:endParaRPr>
+              <a:t>tips 3-4 per feature
+— កសិករ មិនអានអត្ថបទវែង</a:t>
+            </a:r>
           </a:p>
         </p:txBody>
       </p:sp>
@@ -13373,13 +12551,8 @@
                   <a:srgbClr val="1BB889"/>
                 </a:solidFill>
               </a:rPr>
-              <a:t>Use SF Symbols</a:t>
-            </a:r>
-            <a:endParaRPr sz="1300" b="1" i="0">
-              <a:solidFill>
-                <a:srgbClr val="1BB889"/>
-              </a:solidFill>
-            </a:endParaRPr>
+              <a:t>ប្រើ SF Symbols</a:t>
+            </a:r>
           </a:p>
         </p:txBody>
       </p:sp>
@@ -13412,14 +12585,9 @@
                   <a:srgbClr val="AAAABB"/>
                 </a:solidFill>
               </a:rPr>
-              <a:t>Match icons used in the app
-so farmers recognise screens</a:t>
-            </a:r>
-            <a:endParaRPr sz="1200" b="0" i="0">
-              <a:solidFill>
-                <a:srgbClr val="AAAABB"/>
-              </a:solidFill>
-            </a:endParaRPr>
+              <a:t>ផ្ដល់ icons ដូចក្នុង app
+ដើម្បីកសិករស្គាល់</a:t>
+            </a:r>
           </a:p>
         </p:txBody>
       </p:sp>
@@ -13495,13 +12663,8 @@
                   <a:srgbClr val="1BB889"/>
                 </a:solidFill>
               </a:rPr>
-              <a:t>Khmer first</a:t>
-            </a:r>
-            <a:endParaRPr sz="1300" b="1" i="0">
-              <a:solidFill>
-                <a:srgbClr val="1BB889"/>
-              </a:solidFill>
-            </a:endParaRPr>
+              <a:t>ខ្មែរជាមុន</a:t>
+            </a:r>
           </a:p>
         </p:txBody>
       </p:sp>
@@ -13534,14 +12697,9 @@
                   <a:srgbClr val="AAAABB"/>
                 </a:solidFill>
               </a:rPr>
-              <a:t>Write guide entirely in Khmer;
-add English in parentheses</a:t>
-            </a:r>
-            <a:endParaRPr sz="1200" b="0" i="0">
-              <a:solidFill>
-                <a:srgbClr val="AAAABB"/>
-              </a:solidFill>
-            </a:endParaRPr>
+              <a:t>សរសេរ ការណែនាំ ជាខ្មែរ;
+បន្ថែម English ក្នុងវង់ក្រចក</a:t>
+            </a:r>
           </a:p>
         </p:txBody>
       </p:sp>
@@ -13619,11 +12777,6 @@
               </a:rPr>
               <a:t>Screenshot cards</a:t>
             </a:r>
-            <a:endParaRPr sz="1300" b="1" i="0">
-              <a:solidFill>
-                <a:srgbClr val="1BB889"/>
-              </a:solidFill>
-            </a:endParaRPr>
           </a:p>
         </p:txBody>
       </p:sp>
@@ -13656,14 +12809,9 @@
                   <a:srgbClr val="AAAABB"/>
                 </a:solidFill>
               </a:rPr>
-              <a:t>Add a real app screenshot
-for each feature section</a:t>
-            </a:r>
-            <a:endParaRPr sz="1200" b="0" i="0">
-              <a:solidFill>
-                <a:srgbClr val="AAAABB"/>
-              </a:solidFill>
-            </a:endParaRPr>
+              <a:t>បន្ថែម screenshot ពិត
+ចំពោះ feature នីមួយៗ</a:t>
+            </a:r>
           </a:p>
         </p:txBody>
       </p:sp>
@@ -13739,13 +12887,8 @@
                   <a:srgbClr val="1BB889"/>
                 </a:solidFill>
               </a:rPr>
-              <a:t>Accessible via ⚙️</a:t>
-            </a:r>
-            <a:endParaRPr sz="1300" b="1" i="0">
-              <a:solidFill>
-                <a:srgbClr val="1BB889"/>
-              </a:solidFill>
-            </a:endParaRPr>
+              <a:t>ចូលតាម ⚙️</a:t>
+            </a:r>
           </a:p>
         </p:txBody>
       </p:sp>
@@ -13778,14 +12921,9 @@
                   <a:srgbClr val="AAAABB"/>
                 </a:solidFill>
               </a:rPr>
-              <a:t>Add Guide to Settings tab
-so it's always findable</a:t>
-            </a:r>
-            <a:endParaRPr sz="1200" b="0" i="0">
-              <a:solidFill>
-                <a:srgbClr val="AAAABB"/>
-              </a:solidFill>
-            </a:endParaRPr>
+              <a:t>បន្ថែម ការណែនាំ ក្នុង Settings tab
+ឱ្យ​ស្វែងរកបានជានិច្ច</a:t>
+            </a:r>
           </a:p>
         </p:txBody>
       </p:sp>
@@ -13798,7 +12936,7 @@
 </file>
 
 <file path=ppt/slides/slide7.xml><?xml version="1.0" encoding="utf-8"?>
-<p:sld xmlns:a="http://schemas.openxmlformats.org/drawingml/2006/main" xmlns:r="http://schemas.openxmlformats.org/officeDocument/2006/relationships" xmlns:p="http://schemas.openxmlformats.org/presentationml/2006/main">
+<p:sld xmlns:a="http://schemas.openxmlformats.org/drawingml/2006/main" xmlns:p="http://schemas.openxmlformats.org/presentationml/2006/main" xmlns:r="http://schemas.openxmlformats.org/officeDocument/2006/relationships">
   <p:cSld>
     <p:bg>
       <p:bgPr>
@@ -13887,13 +13025,8 @@
                   <a:srgbClr val="FFFFFF"/>
                 </a:solidFill>
               </a:rPr>
-              <a:t>📣  Farmer Feedback Collection Plan</a:t>
-            </a:r>
-            <a:endParaRPr sz="2600" b="1" i="0">
-              <a:solidFill>
-                <a:srgbClr val="FFFFFF"/>
-              </a:solidFill>
-            </a:endParaRPr>
+              <a:t>📣  ផែនការប្រមូល Feedback កសិករ</a:t>
+            </a:r>
           </a:p>
         </p:txBody>
       </p:sp>
@@ -13926,13 +13059,8 @@
                   <a:srgbClr val="F39620"/>
                 </a:solidFill>
               </a:rPr>
-              <a:t>Key Questions to Ask Farmers</a:t>
-            </a:r>
-            <a:endParaRPr sz="1500" b="1" i="0">
-              <a:solidFill>
-                <a:srgbClr val="F39620"/>
-              </a:solidFill>
-            </a:endParaRPr>
+              <a:t>សំណួរសំខាន់ ដែលត្រូវសួរកសិករ</a:t>
+            </a:r>
           </a:p>
         </p:txBody>
       </p:sp>
@@ -14053,11 +13181,6 @@
               </a:rPr>
               <a:t>💰 Finance</a:t>
             </a:r>
-            <a:endParaRPr sz="1300" b="1" i="0">
-              <a:solidFill>
-                <a:srgbClr val="F39620"/>
-              </a:solidFill>
-            </a:endParaRPr>
           </a:p>
         </p:txBody>
       </p:sp>
@@ -14093,11 +13216,6 @@
               <a:t>Did you record all income &amp; expenses this week?
 Were any categories missing?</a:t>
             </a:r>
-            <a:endParaRPr sz="1100" b="0" i="0">
-              <a:solidFill>
-                <a:srgbClr val="FFFFFF"/>
-              </a:solidFill>
-            </a:endParaRPr>
           </a:p>
         </p:txBody>
       </p:sp>
@@ -14218,11 +13336,6 @@
               </a:rPr>
               <a:t>📅 Calendar</a:t>
             </a:r>
-            <a:endParaRPr sz="1300" b="1" i="0">
-              <a:solidFill>
-                <a:srgbClr val="F39620"/>
-              </a:solidFill>
-            </a:endParaRPr>
           </a:p>
         </p:txBody>
       </p:sp>
@@ -14258,11 +13371,6 @@
               <a:t>Did you receive reminders before farm tasks?
 Were times correct?</a:t>
             </a:r>
-            <a:endParaRPr sz="1100" b="0" i="0">
-              <a:solidFill>
-                <a:srgbClr val="FFFFFF"/>
-              </a:solidFill>
-            </a:endParaRPr>
           </a:p>
         </p:txBody>
       </p:sp>
@@ -14383,11 +13491,6 @@
               </a:rPr>
               <a:t>🌿 Pest Guide</a:t>
             </a:r>
-            <a:endParaRPr sz="1300" b="1" i="0">
-              <a:solidFill>
-                <a:srgbClr val="F39620"/>
-              </a:solidFill>
-            </a:endParaRPr>
           </a:p>
         </p:txBody>
       </p:sp>
@@ -14423,11 +13526,6 @@
               <a:t>Did you find your crop's pest in the guide?
 Was the treatment clear enough?</a:t>
             </a:r>
-            <a:endParaRPr sz="1100" b="0" i="0">
-              <a:solidFill>
-                <a:srgbClr val="FFFFFF"/>
-              </a:solidFill>
-            </a:endParaRPr>
           </a:p>
         </p:txBody>
       </p:sp>
@@ -14548,11 +13646,6 @@
               </a:rPr>
               <a:t>📓 Journal</a:t>
             </a:r>
-            <a:endParaRPr sz="1300" b="1" i="0">
-              <a:solidFill>
-                <a:srgbClr val="F39620"/>
-              </a:solidFill>
-            </a:endParaRPr>
           </a:p>
         </p:txBody>
       </p:sp>
@@ -14588,11 +13681,6 @@
               <a:t>Did you add daily notes &amp; photos?
 Was the weather picker useful?</a:t>
             </a:r>
-            <a:endParaRPr sz="1100" b="0" i="0">
-              <a:solidFill>
-                <a:srgbClr val="FFFFFF"/>
-              </a:solidFill>
-            </a:endParaRPr>
           </a:p>
         </p:txBody>
       </p:sp>
@@ -14713,11 +13801,6 @@
               </a:rPr>
               <a:t>🏠 Dashboard</a:t>
             </a:r>
-            <a:endParaRPr sz="1300" b="1" i="0">
-              <a:solidFill>
-                <a:srgbClr val="F39620"/>
-              </a:solidFill>
-            </a:endParaRPr>
           </a:p>
         </p:txBody>
       </p:sp>
@@ -14753,11 +13836,6 @@
               <a:t>Could you see today's summary at a glance?
 Was anything confusing?</a:t>
             </a:r>
-            <a:endParaRPr sz="1100" b="0" i="0">
-              <a:solidFill>
-                <a:srgbClr val="FFFFFF"/>
-              </a:solidFill>
-            </a:endParaRPr>
           </a:p>
         </p:txBody>
       </p:sp>
@@ -14790,13 +13868,8 @@
                   <a:srgbClr val="00C9C8"/>
                 </a:solidFill>
               </a:rPr>
-              <a:t>Collection Methods</a:t>
-            </a:r>
-            <a:endParaRPr sz="1500" b="1" i="0">
-              <a:solidFill>
-                <a:srgbClr val="00C9C8"/>
-              </a:solidFill>
-            </a:endParaRPr>
+              <a:t>វិធីប្រមូល</a:t>
+            </a:r>
           </a:p>
         </p:txBody>
       </p:sp>
@@ -14917,11 +13990,6 @@
               </a:rPr>
               <a:t>TestFlight built-in</a:t>
             </a:r>
-            <a:endParaRPr sz="1300" b="1" i="0">
-              <a:solidFill>
-                <a:srgbClr val="00C9C8"/>
-              </a:solidFill>
-            </a:endParaRPr>
           </a:p>
         </p:txBody>
       </p:sp>
@@ -14954,14 +14022,9 @@
                   <a:srgbClr val="FFFFFF"/>
                 </a:solidFill>
               </a:rPr>
-              <a:t>Farmers long-press → screenshot + comment
-→ sent directly to App Store Connect</a:t>
-            </a:r>
-            <a:endParaRPr sz="1200" b="0" i="0">
-              <a:solidFill>
-                <a:srgbClr val="FFFFFF"/>
-              </a:solidFill>
-            </a:endParaRPr>
+              <a:t>កសិករ long-press → screenshot + comment
+→ ផ្ញើដោយផ្ទាល់ App Store Connect</a:t>
+            </a:r>
           </a:p>
         </p:txBody>
       </p:sp>
@@ -15080,13 +14143,8 @@
                   <a:srgbClr val="00C9C8"/>
                 </a:solidFill>
               </a:rPr>
-              <a:t>In-App Feedback Form</a:t>
-            </a:r>
-            <a:endParaRPr sz="1300" b="1" i="0">
-              <a:solidFill>
-                <a:srgbClr val="00C9C8"/>
-              </a:solidFill>
-            </a:endParaRPr>
+              <a:t>Form Feedback In-App</a:t>
+            </a:r>
           </a:p>
         </p:txBody>
       </p:sp>
@@ -15119,14 +14177,9 @@
                   <a:srgbClr val="FFFFFF"/>
                 </a:solidFill>
               </a:rPr>
-              <a:t>Simple form: 1-5 star rating per module
-+ open text field for suggestions</a:t>
-            </a:r>
-            <a:endParaRPr sz="1200" b="0" i="0">
-              <a:solidFill>
-                <a:srgbClr val="FFFFFF"/>
-              </a:solidFill>
-            </a:endParaRPr>
+              <a:t>Form សាមញ្ញ: rating 1-5 ⭐ ក្នុង module
++ text field ប្រឹក្សា</a:t>
+            </a:r>
           </a:p>
         </p:txBody>
       </p:sp>
@@ -15247,11 +14300,6 @@
               </a:rPr>
               <a:t>WhatsApp / Telegram Group</a:t>
             </a:r>
-            <a:endParaRPr sz="1300" b="1" i="0">
-              <a:solidFill>
-                <a:srgbClr val="00C9C8"/>
-              </a:solidFill>
-            </a:endParaRPr>
           </a:p>
         </p:txBody>
       </p:sp>
@@ -15284,14 +14332,9 @@
                   <a:srgbClr val="FFFFFF"/>
                 </a:solidFill>
               </a:rPr>
-              <a:t>Create a group for beta testers — farmers
-share voice messages (easier than typing)</a:t>
-            </a:r>
-            <a:endParaRPr sz="1200" b="0" i="0">
-              <a:solidFill>
-                <a:srgbClr val="FFFFFF"/>
-              </a:solidFill>
-            </a:endParaRPr>
+              <a:t>បង្កើត group beta testers — កសិករ
+ចែករំលែក voice messages (ងាយជាង type)</a:t>
+            </a:r>
           </a:p>
         </p:txBody>
       </p:sp>
@@ -15410,13 +14453,8 @@
                   <a:srgbClr val="00C9C8"/>
                 </a:solidFill>
               </a:rPr>
-              <a:t>Observation Session</a:t>
-            </a:r>
-            <a:endParaRPr sz="1300" b="1" i="0">
-              <a:solidFill>
-                <a:srgbClr val="00C9C8"/>
-              </a:solidFill>
-            </a:endParaRPr>
+              <a:t>ការសង្កេត</a:t>
+            </a:r>
           </a:p>
         </p:txBody>
       </p:sp>
@@ -15449,14 +14487,9 @@
                   <a:srgbClr val="FFFFFF"/>
                 </a:solidFill>
               </a:rPr>
-              <a:t>Watch 3-5 farmers use the app for 30 min
-without helping — note confusion points</a:t>
-            </a:r>
-            <a:endParaRPr sz="1200" b="0" i="0">
-              <a:solidFill>
-                <a:srgbClr val="FFFFFF"/>
-              </a:solidFill>
-            </a:endParaRPr>
+              <a:t>មើល 3-5 កសិករប្រើ app 30 នាទី
+ដោយមិនជួយ — កត់ចំណុចវង្វេង</a:t>
+            </a:r>
           </a:p>
         </p:txBody>
       </p:sp>
@@ -15469,7 +14502,7 @@
 </file>
 
 <file path=ppt/slides/slide8.xml><?xml version="1.0" encoding="utf-8"?>
-<p:sld xmlns:a="http://schemas.openxmlformats.org/drawingml/2006/main" xmlns:r="http://schemas.openxmlformats.org/officeDocument/2006/relationships" xmlns:p="http://schemas.openxmlformats.org/presentationml/2006/main">
+<p:sld xmlns:a="http://schemas.openxmlformats.org/drawingml/2006/main" xmlns:p="http://schemas.openxmlformats.org/presentationml/2006/main" xmlns:r="http://schemas.openxmlformats.org/officeDocument/2006/relationships">
   <p:cSld>
     <p:bg>
       <p:bgPr>
@@ -15558,13 +14591,8 @@
                   <a:srgbClr val="FFFFFF"/>
                 </a:solidFill>
               </a:rPr>
-              <a:t>⚙️  In-App Feedback Form — Live Coding Example</a:t>
-            </a:r>
-            <a:endParaRPr sz="2600" b="1" i="0">
-              <a:solidFill>
-                <a:srgbClr val="FFFFFF"/>
-              </a:solidFill>
-            </a:endParaRPr>
+              <a:t>⚙️  Form Feedback In-App — ឧទាហរណ៍</a:t>
+            </a:r>
           </a:p>
         </p:txBody>
       </p:sp>
@@ -15638,16 +14666,10 @@
                 <a:solidFill>
                   <a:srgbClr val="A8D8FF"/>
                 </a:solidFill>
-                <a:latin typeface="Courier New" panose="02070609020205090404"/>
+                <a:latin typeface="Courier New"/>
               </a:rPr>
               <a:t>struct FeedbackView: View {</a:t>
             </a:r>
-            <a:endParaRPr sz="1100">
-              <a:solidFill>
-                <a:srgbClr val="A8D8FF"/>
-              </a:solidFill>
-              <a:latin typeface="Courier New" panose="02070609020205090404"/>
-            </a:endParaRPr>
           </a:p>
           <a:p>
             <a:r>
@@ -15655,16 +14677,10 @@
                 <a:solidFill>
                   <a:srgbClr val="A8D8FF"/>
                 </a:solidFill>
-                <a:latin typeface="Courier New" panose="02070609020205090404"/>
+                <a:latin typeface="Courier New"/>
               </a:rPr>
               <a:t>    @State private var rating: Int = 0</a:t>
             </a:r>
-            <a:endParaRPr sz="1100">
-              <a:solidFill>
-                <a:srgbClr val="A8D8FF"/>
-              </a:solidFill>
-              <a:latin typeface="Courier New" panose="02070609020205090404"/>
-            </a:endParaRPr>
           </a:p>
           <a:p>
             <a:r>
@@ -15672,16 +14688,10 @@
                 <a:solidFill>
                   <a:srgbClr val="A8D8FF"/>
                 </a:solidFill>
-                <a:latin typeface="Courier New" panose="02070609020205090404"/>
+                <a:latin typeface="Courier New"/>
               </a:rPr>
               <a:t>    @State private var comment: String = ""</a:t>
             </a:r>
-            <a:endParaRPr sz="1100">
-              <a:solidFill>
-                <a:srgbClr val="A8D8FF"/>
-              </a:solidFill>
-              <a:latin typeface="Courier New" panose="02070609020205090404"/>
-            </a:endParaRPr>
           </a:p>
           <a:p>
             <a:r>
@@ -15689,19 +14699,10 @@
                 <a:solidFill>
                   <a:srgbClr val="A8D8FF"/>
                 </a:solidFill>
-                <a:latin typeface="Courier New" panose="02070609020205090404"/>
+                <a:latin typeface="Courier New"/>
               </a:rPr>
               <a:t>    @State private var submitted = false</a:t>
             </a:r>
-            <a:endParaRPr sz="1100">
-              <a:solidFill>
-                <a:srgbClr val="A8D8FF"/>
-              </a:solidFill>
-              <a:latin typeface="Courier New" panose="02070609020205090404"/>
-            </a:endParaRPr>
-          </a:p>
-          <a:p>
-            <a:endParaRPr sz="1100"/>
           </a:p>
           <a:p>
             <a:r>
@@ -15709,16 +14710,21 @@
                 <a:solidFill>
                   <a:srgbClr val="A8D8FF"/>
                 </a:solidFill>
-                <a:latin typeface="Courier New" panose="02070609020205090404"/>
+                <a:latin typeface="Courier New"/>
+              </a:rPr>
+              <a:t/>
+            </a:r>
+          </a:p>
+          <a:p>
+            <a:r>
+              <a:rPr sz="1100">
+                <a:solidFill>
+                  <a:srgbClr val="A8D8FF"/>
+                </a:solidFill>
+                <a:latin typeface="Courier New"/>
               </a:rPr>
               <a:t>    var body: some View {</a:t>
             </a:r>
-            <a:endParaRPr sz="1100">
-              <a:solidFill>
-                <a:srgbClr val="A8D8FF"/>
-              </a:solidFill>
-              <a:latin typeface="Courier New" panose="02070609020205090404"/>
-            </a:endParaRPr>
           </a:p>
           <a:p>
             <a:r>
@@ -15726,16 +14732,10 @@
                 <a:solidFill>
                   <a:srgbClr val="A8D8FF"/>
                 </a:solidFill>
-                <a:latin typeface="Courier New" panose="02070609020205090404"/>
+                <a:latin typeface="Courier New"/>
               </a:rPr>
               <a:t>        Form {</a:t>
             </a:r>
-            <a:endParaRPr sz="1100">
-              <a:solidFill>
-                <a:srgbClr val="A8D8FF"/>
-              </a:solidFill>
-              <a:latin typeface="Courier New" panose="02070609020205090404"/>
-            </a:endParaRPr>
           </a:p>
           <a:p>
             <a:r>
@@ -15743,16 +14743,10 @@
                 <a:solidFill>
                   <a:srgbClr val="A8D8FF"/>
                 </a:solidFill>
-                <a:latin typeface="Courier New" panose="02070609020205090404"/>
+                <a:latin typeface="Courier New"/>
               </a:rPr>
               <a:t>            Section("វាយតម្លៃកម្មវិធី") {</a:t>
             </a:r>
-            <a:endParaRPr sz="1100">
-              <a:solidFill>
-                <a:srgbClr val="A8D8FF"/>
-              </a:solidFill>
-              <a:latin typeface="Courier New" panose="02070609020205090404"/>
-            </a:endParaRPr>
           </a:p>
           <a:p>
             <a:r>
@@ -15760,16 +14754,10 @@
                 <a:solidFill>
                   <a:srgbClr val="A8D8FF"/>
                 </a:solidFill>
-                <a:latin typeface="Courier New" panose="02070609020205090404"/>
+                <a:latin typeface="Courier New"/>
               </a:rPr>
               <a:t>                HStack {</a:t>
             </a:r>
-            <a:endParaRPr sz="1100">
-              <a:solidFill>
-                <a:srgbClr val="A8D8FF"/>
-              </a:solidFill>
-              <a:latin typeface="Courier New" panose="02070609020205090404"/>
-            </a:endParaRPr>
           </a:p>
           <a:p>
             <a:r>
@@ -15777,16 +14765,10 @@
                 <a:solidFill>
                   <a:srgbClr val="A8D8FF"/>
                 </a:solidFill>
-                <a:latin typeface="Courier New" panose="02070609020205090404"/>
+                <a:latin typeface="Courier New"/>
               </a:rPr>
               <a:t>                    ForEach(1...5, id: \.self) { star in</a:t>
             </a:r>
-            <a:endParaRPr sz="1100">
-              <a:solidFill>
-                <a:srgbClr val="A8D8FF"/>
-              </a:solidFill>
-              <a:latin typeface="Courier New" panose="02070609020205090404"/>
-            </a:endParaRPr>
           </a:p>
           <a:p>
             <a:r>
@@ -15794,16 +14776,10 @@
                 <a:solidFill>
                   <a:srgbClr val="A8D8FF"/>
                 </a:solidFill>
-                <a:latin typeface="Courier New" panose="02070609020205090404"/>
+                <a:latin typeface="Courier New"/>
               </a:rPr>
               <a:t>                        Image(systemName: star &lt;= rating</a:t>
             </a:r>
-            <a:endParaRPr sz="1100">
-              <a:solidFill>
-                <a:srgbClr val="A8D8FF"/>
-              </a:solidFill>
-              <a:latin typeface="Courier New" panose="02070609020205090404"/>
-            </a:endParaRPr>
           </a:p>
           <a:p>
             <a:r>
@@ -15811,16 +14787,10 @@
                 <a:solidFill>
                   <a:srgbClr val="A8D8FF"/>
                 </a:solidFill>
-                <a:latin typeface="Courier New" panose="02070609020205090404"/>
+                <a:latin typeface="Courier New"/>
               </a:rPr>
               <a:t>                            ? "star.fill" : "star")</a:t>
             </a:r>
-            <a:endParaRPr sz="1100">
-              <a:solidFill>
-                <a:srgbClr val="A8D8FF"/>
-              </a:solidFill>
-              <a:latin typeface="Courier New" panose="02070609020205090404"/>
-            </a:endParaRPr>
           </a:p>
           <a:p>
             <a:r>
@@ -15828,16 +14798,10 @@
                 <a:solidFill>
                   <a:srgbClr val="A8D8FF"/>
                 </a:solidFill>
-                <a:latin typeface="Courier New" panose="02070609020205090404"/>
+                <a:latin typeface="Courier New"/>
               </a:rPr>
               <a:t>                            .foregroundColor(.yellow)</a:t>
             </a:r>
-            <a:endParaRPr sz="1100">
-              <a:solidFill>
-                <a:srgbClr val="A8D8FF"/>
-              </a:solidFill>
-              <a:latin typeface="Courier New" panose="02070609020205090404"/>
-            </a:endParaRPr>
           </a:p>
           <a:p>
             <a:r>
@@ -15845,16 +14809,10 @@
                 <a:solidFill>
                   <a:srgbClr val="A8D8FF"/>
                 </a:solidFill>
-                <a:latin typeface="Courier New" panose="02070609020205090404"/>
+                <a:latin typeface="Courier New"/>
               </a:rPr>
               <a:t>                            .font(.title2)</a:t>
             </a:r>
-            <a:endParaRPr sz="1100">
-              <a:solidFill>
-                <a:srgbClr val="A8D8FF"/>
-              </a:solidFill>
-              <a:latin typeface="Courier New" panose="02070609020205090404"/>
-            </a:endParaRPr>
           </a:p>
           <a:p>
             <a:r>
@@ -15862,16 +14820,10 @@
                 <a:solidFill>
                   <a:srgbClr val="A8D8FF"/>
                 </a:solidFill>
-                <a:latin typeface="Courier New" panose="02070609020205090404"/>
+                <a:latin typeface="Courier New"/>
               </a:rPr>
               <a:t>                            .onTapGesture { rating = star }</a:t>
             </a:r>
-            <a:endParaRPr sz="1100">
-              <a:solidFill>
-                <a:srgbClr val="A8D8FF"/>
-              </a:solidFill>
-              <a:latin typeface="Courier New" panose="02070609020205090404"/>
-            </a:endParaRPr>
           </a:p>
           <a:p>
             <a:r>
@@ -15879,16 +14831,10 @@
                 <a:solidFill>
                   <a:srgbClr val="A8D8FF"/>
                 </a:solidFill>
-                <a:latin typeface="Courier New" panose="02070609020205090404"/>
+                <a:latin typeface="Courier New"/>
               </a:rPr>
               <a:t>                    }</a:t>
             </a:r>
-            <a:endParaRPr sz="1100">
-              <a:solidFill>
-                <a:srgbClr val="A8D8FF"/>
-              </a:solidFill>
-              <a:latin typeface="Courier New" panose="02070609020205090404"/>
-            </a:endParaRPr>
           </a:p>
           <a:p>
             <a:r>
@@ -15896,16 +14842,10 @@
                 <a:solidFill>
                   <a:srgbClr val="A8D8FF"/>
                 </a:solidFill>
-                <a:latin typeface="Courier New" panose="02070609020205090404"/>
+                <a:latin typeface="Courier New"/>
               </a:rPr>
               <a:t>                }</a:t>
             </a:r>
-            <a:endParaRPr sz="1100">
-              <a:solidFill>
-                <a:srgbClr val="A8D8FF"/>
-              </a:solidFill>
-              <a:latin typeface="Courier New" panose="02070609020205090404"/>
-            </a:endParaRPr>
           </a:p>
           <a:p>
             <a:r>
@@ -15913,16 +14853,10 @@
                 <a:solidFill>
                   <a:srgbClr val="A8D8FF"/>
                 </a:solidFill>
-                <a:latin typeface="Courier New" panose="02070609020205090404"/>
+                <a:latin typeface="Courier New"/>
               </a:rPr>
               <a:t>            }</a:t>
             </a:r>
-            <a:endParaRPr sz="1100">
-              <a:solidFill>
-                <a:srgbClr val="A8D8FF"/>
-              </a:solidFill>
-              <a:latin typeface="Courier New" panose="02070609020205090404"/>
-            </a:endParaRPr>
           </a:p>
           <a:p>
             <a:r>
@@ -15930,16 +14864,10 @@
                 <a:solidFill>
                   <a:srgbClr val="A8D8FF"/>
                 </a:solidFill>
-                <a:latin typeface="Courier New" panose="02070609020205090404"/>
+                <a:latin typeface="Courier New"/>
               </a:rPr>
               <a:t>            Section("យោបល់") {</a:t>
             </a:r>
-            <a:endParaRPr sz="1100">
-              <a:solidFill>
-                <a:srgbClr val="A8D8FF"/>
-              </a:solidFill>
-              <a:latin typeface="Courier New" panose="02070609020205090404"/>
-            </a:endParaRPr>
           </a:p>
           <a:p>
             <a:r>
@@ -15947,16 +14875,10 @@
                 <a:solidFill>
                   <a:srgbClr val="A8D8FF"/>
                 </a:solidFill>
-                <a:latin typeface="Courier New" panose="02070609020205090404"/>
+                <a:latin typeface="Courier New"/>
               </a:rPr>
               <a:t>                TextEditor(text: $comment)</a:t>
             </a:r>
-            <a:endParaRPr sz="1100">
-              <a:solidFill>
-                <a:srgbClr val="A8D8FF"/>
-              </a:solidFill>
-              <a:latin typeface="Courier New" panose="02070609020205090404"/>
-            </a:endParaRPr>
           </a:p>
           <a:p>
             <a:r>
@@ -15964,16 +14886,10 @@
                 <a:solidFill>
                   <a:srgbClr val="A8D8FF"/>
                 </a:solidFill>
-                <a:latin typeface="Courier New" panose="02070609020205090404"/>
+                <a:latin typeface="Courier New"/>
               </a:rPr>
               <a:t>                    .frame(minHeight: 100)</a:t>
             </a:r>
-            <a:endParaRPr sz="1100">
-              <a:solidFill>
-                <a:srgbClr val="A8D8FF"/>
-              </a:solidFill>
-              <a:latin typeface="Courier New" panose="02070609020205090404"/>
-            </a:endParaRPr>
           </a:p>
           <a:p>
             <a:r>
@@ -15981,16 +14897,10 @@
                 <a:solidFill>
                   <a:srgbClr val="A8D8FF"/>
                 </a:solidFill>
-                <a:latin typeface="Courier New" panose="02070609020205090404"/>
+                <a:latin typeface="Courier New"/>
               </a:rPr>
               <a:t>            }</a:t>
             </a:r>
-            <a:endParaRPr sz="1100">
-              <a:solidFill>
-                <a:srgbClr val="A8D8FF"/>
-              </a:solidFill>
-              <a:latin typeface="Courier New" panose="02070609020205090404"/>
-            </a:endParaRPr>
           </a:p>
           <a:p>
             <a:r>
@@ -15998,16 +14908,10 @@
                 <a:solidFill>
                   <a:srgbClr val="A8D8FF"/>
                 </a:solidFill>
-                <a:latin typeface="Courier New" panose="02070609020205090404"/>
+                <a:latin typeface="Courier New"/>
               </a:rPr>
               <a:t>            Button("ផ្ញើ") { submitted = true }</a:t>
             </a:r>
-            <a:endParaRPr sz="1100">
-              <a:solidFill>
-                <a:srgbClr val="A8D8FF"/>
-              </a:solidFill>
-              <a:latin typeface="Courier New" panose="02070609020205090404"/>
-            </a:endParaRPr>
           </a:p>
           <a:p>
             <a:r>
@@ -16015,16 +14919,10 @@
                 <a:solidFill>
                   <a:srgbClr val="A8D8FF"/>
                 </a:solidFill>
-                <a:latin typeface="Courier New" panose="02070609020205090404"/>
+                <a:latin typeface="Courier New"/>
               </a:rPr>
               <a:t>                .disabled(rating == 0)</a:t>
             </a:r>
-            <a:endParaRPr sz="1100">
-              <a:solidFill>
-                <a:srgbClr val="A8D8FF"/>
-              </a:solidFill>
-              <a:latin typeface="Courier New" panose="02070609020205090404"/>
-            </a:endParaRPr>
           </a:p>
           <a:p>
             <a:r>
@@ -16032,16 +14930,10 @@
                 <a:solidFill>
                   <a:srgbClr val="A8D8FF"/>
                 </a:solidFill>
-                <a:latin typeface="Courier New" panose="02070609020205090404"/>
+                <a:latin typeface="Courier New"/>
               </a:rPr>
               <a:t>        }</a:t>
             </a:r>
-            <a:endParaRPr sz="1100">
-              <a:solidFill>
-                <a:srgbClr val="A8D8FF"/>
-              </a:solidFill>
-              <a:latin typeface="Courier New" panose="02070609020205090404"/>
-            </a:endParaRPr>
           </a:p>
           <a:p>
             <a:r>
@@ -16049,16 +14941,10 @@
                 <a:solidFill>
                   <a:srgbClr val="A8D8FF"/>
                 </a:solidFill>
-                <a:latin typeface="Courier New" panose="02070609020205090404"/>
+                <a:latin typeface="Courier New"/>
               </a:rPr>
               <a:t>        .navigationTitle("ផ្ញើមតិ")</a:t>
             </a:r>
-            <a:endParaRPr sz="1100">
-              <a:solidFill>
-                <a:srgbClr val="A8D8FF"/>
-              </a:solidFill>
-              <a:latin typeface="Courier New" panose="02070609020205090404"/>
-            </a:endParaRPr>
           </a:p>
           <a:p>
             <a:r>
@@ -16066,16 +14952,10 @@
                 <a:solidFill>
                   <a:srgbClr val="A8D8FF"/>
                 </a:solidFill>
-                <a:latin typeface="Courier New" panose="02070609020205090404"/>
+                <a:latin typeface="Courier New"/>
               </a:rPr>
               <a:t>    }</a:t>
             </a:r>
-            <a:endParaRPr sz="1100">
-              <a:solidFill>
-                <a:srgbClr val="A8D8FF"/>
-              </a:solidFill>
-              <a:latin typeface="Courier New" panose="02070609020205090404"/>
-            </a:endParaRPr>
           </a:p>
           <a:p>
             <a:r>
@@ -16083,16 +14963,10 @@
                 <a:solidFill>
                   <a:srgbClr val="A8D8FF"/>
                 </a:solidFill>
-                <a:latin typeface="Courier New" panose="02070609020205090404"/>
+                <a:latin typeface="Courier New"/>
               </a:rPr>
               <a:t>}</a:t>
             </a:r>
-            <a:endParaRPr sz="1100">
-              <a:solidFill>
-                <a:srgbClr val="A8D8FF"/>
-              </a:solidFill>
-              <a:latin typeface="Courier New" panose="02070609020205090404"/>
-            </a:endParaRPr>
           </a:p>
         </p:txBody>
       </p:sp>
@@ -16127,11 +15001,6 @@
               </a:rPr>
               <a:t>Preview</a:t>
             </a:r>
-            <a:endParaRPr sz="1600" b="1" i="0">
-              <a:solidFill>
-                <a:srgbClr val="AAAABB"/>
-              </a:solidFill>
-            </a:endParaRPr>
           </a:p>
         </p:txBody>
       </p:sp>
@@ -16209,11 +15078,6 @@
               </a:rPr>
               <a:t>វាយតម្លៃកម្មវិធី</a:t>
             </a:r>
-            <a:endParaRPr sz="1300" b="1" i="0">
-              <a:solidFill>
-                <a:srgbClr val="00C9C8"/>
-              </a:solidFill>
-            </a:endParaRPr>
           </a:p>
         </p:txBody>
       </p:sp>
@@ -16248,11 +15112,6 @@
               </a:rPr>
               <a:t>★ ★ ★ ★ ☆</a:t>
             </a:r>
-            <a:endParaRPr sz="2200" b="0" i="0">
-              <a:solidFill>
-                <a:srgbClr val="FFD700"/>
-              </a:solidFill>
-            </a:endParaRPr>
           </a:p>
         </p:txBody>
       </p:sp>
@@ -16287,11 +15146,6 @@
               </a:rPr>
               <a:t>យោបល់</a:t>
             </a:r>
-            <a:endParaRPr sz="1300" b="1" i="0">
-              <a:solidFill>
-                <a:srgbClr val="00C9C8"/>
-              </a:solidFill>
-            </a:endParaRPr>
           </a:p>
         </p:txBody>
       </p:sp>
@@ -16371,11 +15225,6 @@
 ចង់បានប្រភេទពាណិជ្ជកម្ម
 បន្ថែម...</a:t>
             </a:r>
-            <a:endParaRPr sz="1100" b="0" i="0">
-              <a:solidFill>
-                <a:srgbClr val="AAAABB"/>
-              </a:solidFill>
-            </a:endParaRPr>
           </a:p>
         </p:txBody>
       </p:sp>
@@ -16453,11 +15302,6 @@
               </a:rPr>
               <a:t>ផ្ញើ</a:t>
             </a:r>
-            <a:endParaRPr sz="1500" b="1" i="0">
-              <a:solidFill>
-                <a:srgbClr val="FFFFFF"/>
-              </a:solidFill>
-            </a:endParaRPr>
           </a:p>
         </p:txBody>
       </p:sp>
@@ -16493,11 +15337,6 @@
               <a:t>⭐ Ask farmers to rate EACH module
     separately for granular feedback.</a:t>
             </a:r>
-            <a:endParaRPr sz="1200" b="0" i="1">
-              <a:solidFill>
-                <a:srgbClr val="F39620"/>
-              </a:solidFill>
-            </a:endParaRPr>
           </a:p>
         </p:txBody>
       </p:sp>
@@ -16510,7 +15349,7 @@
 </file>
 
 <file path=ppt/slides/slide9.xml><?xml version="1.0" encoding="utf-8"?>
-<p:sld xmlns:a="http://schemas.openxmlformats.org/drawingml/2006/main" xmlns:r="http://schemas.openxmlformats.org/officeDocument/2006/relationships" xmlns:p="http://schemas.openxmlformats.org/presentationml/2006/main">
+<p:sld xmlns:a="http://schemas.openxmlformats.org/drawingml/2006/main" xmlns:p="http://schemas.openxmlformats.org/presentationml/2006/main" xmlns:r="http://schemas.openxmlformats.org/officeDocument/2006/relationships">
   <p:cSld>
     <p:bg>
       <p:bgPr>
@@ -16601,11 +15440,6 @@
               </a:rPr>
               <a:t>🔧  Live Coding — Archive &amp; Upload to TestFlight</a:t>
             </a:r>
-            <a:endParaRPr sz="2600" b="1" i="0">
-              <a:solidFill>
-                <a:srgbClr val="FFFFFF"/>
-              </a:solidFill>
-            </a:endParaRPr>
           </a:p>
         </p:txBody>
       </p:sp>
@@ -16640,11 +15474,6 @@
               </a:rPr>
               <a:t>Pre-Archive Checklist</a:t>
             </a:r>
-            <a:endParaRPr sz="1500" b="1" i="0">
-              <a:solidFill>
-                <a:srgbClr val="00C9C8"/>
-              </a:solidFill>
-            </a:endParaRPr>
           </a:p>
         </p:txBody>
       </p:sp>
@@ -16722,11 +15551,6 @@
               </a:rPr>
               <a:t>✅</a:t>
             </a:r>
-            <a:endParaRPr sz="1400" b="0" i="0">
-              <a:solidFill>
-                <a:srgbClr val="1BB889"/>
-              </a:solidFill>
-            </a:endParaRPr>
           </a:p>
         </p:txBody>
       </p:sp>
@@ -16761,11 +15585,6 @@
               </a:rPr>
               <a:t>Scheme set to Release (not Debug)</a:t>
             </a:r>
-            <a:endParaRPr sz="1300" b="0" i="0">
-              <a:solidFill>
-                <a:srgbClr val="FFFFFF"/>
-              </a:solidFill>
-            </a:endParaRPr>
           </a:p>
         </p:txBody>
       </p:sp>
@@ -16843,11 +15662,6 @@
               </a:rPr>
               <a:t>✅</a:t>
             </a:r>
-            <a:endParaRPr sz="1400" b="0" i="0">
-              <a:solidFill>
-                <a:srgbClr val="1BB889"/>
-              </a:solidFill>
-            </a:endParaRPr>
           </a:p>
         </p:txBody>
       </p:sp>
@@ -16882,11 +15696,6 @@
               </a:rPr>
               <a:t>Version: 1.0.0 · Build: 1</a:t>
             </a:r>
-            <a:endParaRPr sz="1300" b="0" i="0">
-              <a:solidFill>
-                <a:srgbClr val="FFFFFF"/>
-              </a:solidFill>
-            </a:endParaRPr>
           </a:p>
         </p:txBody>
       </p:sp>
@@ -16964,11 +15773,6 @@
               </a:rPr>
               <a:t>✅</a:t>
             </a:r>
-            <a:endParaRPr sz="1400" b="0" i="0">
-              <a:solidFill>
-                <a:srgbClr val="1BB889"/>
-              </a:solidFill>
-            </a:endParaRPr>
           </a:p>
         </p:txBody>
       </p:sp>
@@ -17003,11 +15807,6 @@
               </a:rPr>
               <a:t>Signing: Automatic, your Team selected</a:t>
             </a:r>
-            <a:endParaRPr sz="1300" b="0" i="0">
-              <a:solidFill>
-                <a:srgbClr val="FFFFFF"/>
-              </a:solidFill>
-            </a:endParaRPr>
           </a:p>
         </p:txBody>
       </p:sp>
@@ -17085,11 +15884,6 @@
               </a:rPr>
               <a:t>✅</a:t>
             </a:r>
-            <a:endParaRPr sz="1400" b="0" i="0">
-              <a:solidFill>
-                <a:srgbClr val="1BB889"/>
-              </a:solidFill>
-            </a:endParaRPr>
           </a:p>
         </p:txBody>
       </p:sp>
@@ -17124,11 +15918,6 @@
               </a:rPr>
               <a:t>All DEBUG code removed (print statements)</a:t>
             </a:r>
-            <a:endParaRPr sz="1300" b="0" i="0">
-              <a:solidFill>
-                <a:srgbClr val="FFFFFF"/>
-              </a:solidFill>
-            </a:endParaRPr>
           </a:p>
         </p:txBody>
       </p:sp>
@@ -17206,11 +15995,6 @@
               </a:rPr>
               <a:t>✅</a:t>
             </a:r>
-            <a:endParaRPr sz="1400" b="0" i="0">
-              <a:solidFill>
-                <a:srgbClr val="1BB889"/>
-              </a:solidFill>
-            </a:endParaRPr>
           </a:p>
         </p:txBody>
       </p:sp>
@@ -17245,11 +16029,6 @@
               </a:rPr>
               <a:t>App icon set — no missing sizes</a:t>
             </a:r>
-            <a:endParaRPr sz="1300" b="0" i="0">
-              <a:solidFill>
-                <a:srgbClr val="FFFFFF"/>
-              </a:solidFill>
-            </a:endParaRPr>
           </a:p>
         </p:txBody>
       </p:sp>
@@ -17327,11 +16106,6 @@
               </a:rPr>
               <a:t>✅</a:t>
             </a:r>
-            <a:endParaRPr sz="1400" b="0" i="0">
-              <a:solidFill>
-                <a:srgbClr val="1BB889"/>
-              </a:solidFill>
-            </a:endParaRPr>
           </a:p>
         </p:txBody>
       </p:sp>
@@ -17366,11 +16140,6 @@
               </a:rPr>
               <a:t>LaunchScreen configured</a:t>
             </a:r>
-            <a:endParaRPr sz="1300" b="0" i="0">
-              <a:solidFill>
-                <a:srgbClr val="FFFFFF"/>
-              </a:solidFill>
-            </a:endParaRPr>
           </a:p>
         </p:txBody>
       </p:sp>
@@ -17448,11 +16217,6 @@
               </a:rPr>
               <a:t>✅</a:t>
             </a:r>
-            <a:endParaRPr sz="1400" b="0" i="0">
-              <a:solidFill>
-                <a:srgbClr val="1BB889"/>
-              </a:solidFill>
-            </a:endParaRPr>
           </a:p>
         </p:txBody>
       </p:sp>
@@ -17487,11 +16251,6 @@
               </a:rPr>
               <a:t>Destination: Any iOS Device (arm64)</a:t>
             </a:r>
-            <a:endParaRPr sz="1300" b="0" i="0">
-              <a:solidFill>
-                <a:srgbClr val="FFFFFF"/>
-              </a:solidFill>
-            </a:endParaRPr>
           </a:p>
         </p:txBody>
       </p:sp>
@@ -17526,11 +16285,6 @@
               </a:rPr>
               <a:t>Upload Steps</a:t>
             </a:r>
-            <a:endParaRPr sz="1500" b="1" i="0">
-              <a:solidFill>
-                <a:srgbClr val="F39620"/>
-              </a:solidFill>
-            </a:endParaRPr>
           </a:p>
         </p:txBody>
       </p:sp>
@@ -17608,11 +16362,6 @@
               </a:rPr>
               <a:t>1</a:t>
             </a:r>
-            <a:endParaRPr sz="1300" b="1" i="0">
-              <a:solidFill>
-                <a:srgbClr val="FFFFFF"/>
-              </a:solidFill>
-            </a:endParaRPr>
           </a:p>
         </p:txBody>
       </p:sp>
@@ -17690,11 +16439,6 @@
               </a:rPr>
               <a:t>Product → Archive  (wait 2-5 min for build)</a:t>
             </a:r>
-            <a:endParaRPr sz="1200" b="0" i="0">
-              <a:solidFill>
-                <a:srgbClr val="FFFFFF"/>
-              </a:solidFill>
-            </a:endParaRPr>
           </a:p>
         </p:txBody>
       </p:sp>
@@ -17772,11 +16516,6 @@
               </a:rPr>
               <a:t>2</a:t>
             </a:r>
-            <a:endParaRPr sz="1300" b="1" i="0">
-              <a:solidFill>
-                <a:srgbClr val="FFFFFF"/>
-              </a:solidFill>
-            </a:endParaRPr>
           </a:p>
         </p:txBody>
       </p:sp>
@@ -17854,11 +16593,6 @@
               </a:rPr>
               <a:t>Organizer window opens automatically</a:t>
             </a:r>
-            <a:endParaRPr sz="1200" b="0" i="0">
-              <a:solidFill>
-                <a:srgbClr val="FFFFFF"/>
-              </a:solidFill>
-            </a:endParaRPr>
           </a:p>
         </p:txBody>
       </p:sp>
@@ -17936,11 +16670,6 @@
               </a:rPr>
               <a:t>3</a:t>
             </a:r>
-            <a:endParaRPr sz="1300" b="1" i="0">
-              <a:solidFill>
-                <a:srgbClr val="FFFFFF"/>
-              </a:solidFill>
-            </a:endParaRPr>
           </a:p>
         </p:txBody>
       </p:sp>
@@ -18018,11 +16747,6 @@
               </a:rPr>
               <a:t>Select archive → Distribute App</a:t>
             </a:r>
-            <a:endParaRPr sz="1200" b="0" i="0">
-              <a:solidFill>
-                <a:srgbClr val="FFFFFF"/>
-              </a:solidFill>
-            </a:endParaRPr>
           </a:p>
         </p:txBody>
       </p:sp>
@@ -18100,11 +16824,6 @@
               </a:rPr>
               <a:t>4</a:t>
             </a:r>
-            <a:endParaRPr sz="1300" b="1" i="0">
-              <a:solidFill>
-                <a:srgbClr val="FFFFFF"/>
-              </a:solidFill>
-            </a:endParaRPr>
           </a:p>
         </p:txBody>
       </p:sp>
@@ -18182,11 +16901,6 @@
               </a:rPr>
               <a:t>Choose: App Store Connect → Next</a:t>
             </a:r>
-            <a:endParaRPr sz="1200" b="0" i="0">
-              <a:solidFill>
-                <a:srgbClr val="FFFFFF"/>
-              </a:solidFill>
-            </a:endParaRPr>
           </a:p>
         </p:txBody>
       </p:sp>
@@ -18264,11 +16978,6 @@
               </a:rPr>
               <a:t>5</a:t>
             </a:r>
-            <a:endParaRPr sz="1300" b="1" i="0">
-              <a:solidFill>
-                <a:srgbClr val="FFFFFF"/>
-              </a:solidFill>
-            </a:endParaRPr>
           </a:p>
         </p:txBody>
       </p:sp>
@@ -18346,11 +17055,6 @@
               </a:rPr>
               <a:t>Upload (not Export) → keep all checkboxes on</a:t>
             </a:r>
-            <a:endParaRPr sz="1200" b="0" i="0">
-              <a:solidFill>
-                <a:srgbClr val="FFFFFF"/>
-              </a:solidFill>
-            </a:endParaRPr>
           </a:p>
         </p:txBody>
       </p:sp>
@@ -18428,11 +17132,6 @@
               </a:rPr>
               <a:t>6</a:t>
             </a:r>
-            <a:endParaRPr sz="1300" b="1" i="0">
-              <a:solidFill>
-                <a:srgbClr val="FFFFFF"/>
-              </a:solidFill>
-            </a:endParaRPr>
           </a:p>
         </p:txBody>
       </p:sp>
@@ -18510,11 +17209,6 @@
               </a:rPr>
               <a:t>Wait for processing email (5-30 min)</a:t>
             </a:r>
-            <a:endParaRPr sz="1200" b="0" i="0">
-              <a:solidFill>
-                <a:srgbClr val="FFFFFF"/>
-              </a:solidFill>
-            </a:endParaRPr>
           </a:p>
         </p:txBody>
       </p:sp>
@@ -18592,11 +17286,6 @@
               </a:rPr>
               <a:t>7</a:t>
             </a:r>
-            <a:endParaRPr sz="1300" b="1" i="0">
-              <a:solidFill>
-                <a:srgbClr val="FFFFFF"/>
-              </a:solidFill>
-            </a:endParaRPr>
           </a:p>
         </p:txBody>
       </p:sp>
@@ -18674,11 +17363,6 @@
               </a:rPr>
               <a:t>App Store Connect → TestFlight → Select build</a:t>
             </a:r>
-            <a:endParaRPr sz="1200" b="0" i="0">
-              <a:solidFill>
-                <a:srgbClr val="FFFFFF"/>
-              </a:solidFill>
-            </a:endParaRPr>
           </a:p>
         </p:txBody>
       </p:sp>
@@ -18756,11 +17440,6 @@
               </a:rPr>
               <a:t>8</a:t>
             </a:r>
-            <a:endParaRPr sz="1300" b="1" i="0">
-              <a:solidFill>
-                <a:srgbClr val="FFFFFF"/>
-              </a:solidFill>
-            </a:endParaRPr>
           </a:p>
         </p:txBody>
       </p:sp>
@@ -18838,11 +17517,6 @@
               </a:rPr>
               <a:t>Add Internal Testers → Send Invitations</a:t>
             </a:r>
-            <a:endParaRPr sz="1200" b="0" i="0">
-              <a:solidFill>
-                <a:srgbClr val="FFFFFF"/>
-              </a:solidFill>
-            </a:endParaRPr>
           </a:p>
         </p:txBody>
       </p:sp>
@@ -19170,10 +17844,6 @@
       </a:style>
     </a:lnDef>
   </a:objectDefaults>
-  <a:extLst>
-    <a:ext uri="{05A4C25C-085E-4340-85A3-A5531E510DB2}">
-      <thm15:themeFamily xmlns:thm15="http://schemas.microsoft.com/office/thememl/2012/main" name="Office Theme" id="{62F939B6-93AF-4DB8-9C6B-D6C7DFDC589F}" vid="{4A3C46E8-61CC-4603-A589-7422A47A8E4A}"/>
-    </a:ext>
-  </a:extLst>
+  <a:extraClrSchemeLst/>
 </a:theme>
 </file>